--- a/lecons/F3/28_FORM4_LESSON24_Erosional_Features_of_Wave_Action.pptx
+++ b/lecons/F3/28_FORM4_LESSON24_Erosional_Features_of_Wave_Action.pptx
@@ -50,9 +50,13 @@
     <p:sldId id="298" r:id="rId44"/>
     <p:sldId id="299" r:id="rId45"/>
     <p:sldId id="300" r:id="rId46"/>
+    <p:sldId id="301" r:id="rId47"/>
+    <p:sldId id="302" r:id="rId48"/>
+    <p:sldId id="303" r:id="rId49"/>
+    <p:sldId id="304" r:id="rId50"/>
   </p:sldIdLst>
   <p:notesMasterIdLst>
-    <p:notesMasterId r:id="rId47"/>
+    <p:notesMasterId r:id="rId51"/>
   </p:notesMasterIdLst>
   <p:sldSz cx="12192000" cy="6858000"/>
   <p:notesSz cx="6858000" cy="12192000"/>
@@ -634,7 +638,7 @@
           <a:p>
             <a:r>
               <a:rPr lang="en-US" dirty="0"/>
-              <a:t>Listen carefully to this situation from real life. On holiday in Limbe, Rahila sees big waves crash against the rocky coast. At the bottom of a rock face, the waves have cut a hollow and small caves. Think about it, because I am going to ask you some questions.</a:t>
+              <a:t>Listen carefully to this situation from real life. On holiday in Limbe, Rahila sees big waves crash against the rocky coast. At the bottom of a rock face, the waves have cut a hollow and small caves, and a rock stands alone in the sea. She asks: "How can water cut such hard rock, and what shapes does it make?" Think about it, because I am going to ask you some questions.</a:t>
             </a:r>
             <a:endParaRPr lang="en-US" dirty="0"/>
           </a:p>
@@ -810,7 +814,7 @@
           <a:p>
             <a:r>
               <a:rPr lang="en-US" dirty="0"/>
-              <a:t>Good. Rahila wonders how waves can cut hard rock.</a:t>
+              <a:t>Good. Rahila does not understand how waves cut rock and what features they form.</a:t>
             </a:r>
             <a:endParaRPr lang="en-US" dirty="0"/>
           </a:p>
@@ -898,7 +902,7 @@
           <a:p>
             <a:r>
               <a:rPr lang="en-US" dirty="0"/>
-              <a:t>Question 2: What did the waves make? Think for a moment, then raise your hand to answer.</a:t>
+              <a:t>Question 2: What did the waves cut at the bottom of the rock face? Think for a moment, then raise your hand to answer.</a:t>
             </a:r>
             <a:endParaRPr lang="en-US" dirty="0"/>
           </a:p>
@@ -1074,7 +1078,7 @@
           <a:p>
             <a:r>
               <a:rPr lang="en-US" dirty="0"/>
-              <a:t>Question 3: What will happen to the caves after many years? Think for a moment, then raise your hand to answer.</a:t>
+              <a:t>Question 3: What stands alone in the sea? Think for a moment, then raise your hand to answer.</a:t>
             </a:r>
             <a:endParaRPr lang="en-US" dirty="0"/>
           </a:p>
@@ -1162,7 +1166,7 @@
           <a:p>
             <a:r>
               <a:rPr lang="en-US" dirty="0"/>
-              <a:t>Good. They will become arches and then stacks.</a:t>
+              <a:t>Good. A rock: a stack.</a:t>
             </a:r>
             <a:endParaRPr lang="en-US" dirty="0"/>
           </a:p>
@@ -1426,7 +1430,7 @@
           <a:p>
             <a:r>
               <a:rPr lang="en-US" dirty="0"/>
-              <a:t>Activity 1. Look carefully at this picture: waves hit a cliff. Observe every detail before I ask the question.</a:t>
+              <a:t>Activity 1. Look carefully at this picture: a steep rock face on the coast. Observe every detail before I ask the question.</a:t>
             </a:r>
             <a:endParaRPr lang="en-US" dirty="0"/>
           </a:p>
@@ -1690,7 +1694,7 @@
           <a:p>
             <a:r>
               <a:rPr lang="en-US" dirty="0"/>
-              <a:t>Let us check the answer together. They cut the bottom of the rock; the top falls; a steep cliff is left.</a:t>
+              <a:t>Let us check the answer together. They cut the bottom of the rock, the top falls, and a steep cliff is left.</a:t>
             </a:r>
             <a:endParaRPr lang="en-US" dirty="0"/>
           </a:p>
@@ -1778,7 +1782,7 @@
           <a:p>
             <a:r>
               <a:rPr lang="en-US" dirty="0"/>
-              <a:t>Activity 2. Look carefully at this animation: animation: a headland is worn away. Watch the animation to the end; it will play again.</a:t>
+              <a:t>Activity 2. Look carefully at this animation: animation: erosion of a headland. Watch the animation to the end; it will play again.</a:t>
             </a:r>
             <a:endParaRPr lang="en-US" dirty="0"/>
           </a:p>
@@ -1866,7 +1870,7 @@
           <a:p>
             <a:r>
               <a:rPr lang="en-US" dirty="0"/>
-              <a:t>Here is the question for Activity 2: Put in order: stack, cave, stump, arch. Take one minute to think and write your answer in your rough notebook.</a:t>
+              <a:t>Here is the question for Activity 2: Put these features in order: stack, cave, stump, arch. Take one minute to think and write your answer in your rough notebook.</a:t>
             </a:r>
             <a:endParaRPr lang="en-US" dirty="0"/>
           </a:p>
@@ -2042,7 +2046,7 @@
           <a:p>
             <a:r>
               <a:rPr lang="en-US" dirty="0"/>
-              <a:t>Activity 3. Look carefully at this picture: a rock with a hole through it, on the coast. Observe every detail before I ask the question.</a:t>
+              <a:t>Activity 3. Look carefully at this picture: a hole through a rock on the coast. Observe every detail before I ask the question.</a:t>
             </a:r>
             <a:endParaRPr lang="en-US" dirty="0"/>
           </a:p>
@@ -2394,7 +2398,7 @@
           <a:p>
             <a:r>
               <a:rPr lang="en-US" dirty="0"/>
-              <a:t>Let us copy Erosional Processes of Waves. Waves erode the coast through the following processes. On this slide we have Hydraulic action and Abrasion. Write each point on a new line, with the key term first, and explain it in your own words when we revise. When you finish, we go to the next slide.</a:t>
+              <a:t>Let us copy the definitions. The key terms of this lesson are defined as follows. On this slide we have Wave erosion and Headland (cape). Write each point on a new line, with the key term first, and explain it in your own words when we revise. When you finish, we go to the next slide.</a:t>
             </a:r>
             <a:endParaRPr lang="en-US" dirty="0"/>
           </a:p>
@@ -2570,7 +2574,7 @@
           <a:p>
             <a:r>
               <a:rPr lang="en-US" dirty="0"/>
-              <a:t>We continue with Erosional Processes of Waves. On this slide we have Attrition and Solution. Write each point on a new line, with the key term first, and explain it in your own words when we revise.</a:t>
+              <a:t>We continue with the definitions. On this slide we have Bay. Write each point on a new line, with the key term first, and explain it in your own words when we revise.</a:t>
             </a:r>
             <a:endParaRPr lang="en-US" dirty="0"/>
           </a:p>
@@ -2658,7 +2662,7 @@
           <a:p>
             <a:r>
               <a:rPr lang="en-US" dirty="0"/>
-              <a:t>Let us copy Erosional Features. Wave erosion forms the following features. On this slide we have Capes and bays and Cliff and wave-cut platform. Write each point on a new line, with the key term first, and explain it in your own words when we revise. When you finish, we go to the next slide.</a:t>
+              <a:t>Let us copy Erosional Processes of Waves. Waves erode the coast through the following processes. On this slide we have Hydraulic action and Abrasion (corrasion). Write each point on a new line, with the key term first, and explain it in your own words when we revise. When you finish, we go to the next slide.</a:t>
             </a:r>
             <a:endParaRPr lang="en-US" dirty="0"/>
           </a:p>
@@ -2746,7 +2750,7 @@
           <a:p>
             <a:r>
               <a:rPr lang="en-US" dirty="0"/>
-              <a:t>We continue with Erosional Features. On this slide we have Cave, arch, stack and stump. Write each point on a new line, with the key term first, and explain it in your own words when we revise.</a:t>
+              <a:t>We continue with Erosional Processes of Waves. On this slide we have Attrition and Solution (corrosion). Write each point on a new line, with the key term first, and explain it in your own words when we revise.</a:t>
             </a:r>
             <a:endParaRPr lang="en-US" dirty="0"/>
           </a:p>
@@ -2834,7 +2838,7 @@
           <a:p>
             <a:r>
               <a:rPr lang="en-US" dirty="0"/>
-              <a:t>Now draw this illustration in your notebook: erosion of a headland. Give it a title and label it clearly.</a:t>
+              <a:t>Let us copy Erosional Features. Wave erosion forms the following features. Copy the point on Capes and bays on the left, then draw the diagram on the right: capes and bays. Give it a title and label it clearly.</a:t>
             </a:r>
             <a:endParaRPr lang="en-US" dirty="0"/>
           </a:p>
@@ -2922,7 +2926,7 @@
           <a:p>
             <a:r>
               <a:rPr lang="en-US" dirty="0"/>
-              <a:t>Now let us check what you have understood. Question 1: Put in order: arch, stump, cave, stack. Answer in your exercise book.</a:t>
+              <a:t>Copy the point on Cliff and wave-cut platform on the left, then draw the diagram on the right: cliff and wave-cut platform. Give it a title and label it clearly.</a:t>
             </a:r>
             <a:endParaRPr lang="en-US" dirty="0"/>
           </a:p>
@@ -3010,7 +3014,7 @@
           <a:p>
             <a:r>
               <a:rPr lang="en-US" dirty="0"/>
-              <a:t>The expected answer is: cave, arch, stack, stump. If you got it right, well done.</a:t>
+              <a:t>Copy the point on Cave on the left, then draw the diagram on the right: cave, arch, stack and stump. Give it a title and label it clearly.</a:t>
             </a:r>
             <a:endParaRPr lang="en-US" dirty="0"/>
           </a:p>
@@ -3098,7 +3102,7 @@
           <a:p>
             <a:r>
               <a:rPr lang="en-US" dirty="0"/>
-              <a:t>Now let us check what you have understood. Question 2: What is hydraulic action? Answer in your exercise book.</a:t>
+              <a:t>Copy the point on Arch on the left, then draw the diagram on the right: an arch. Give it a title and label it clearly.</a:t>
             </a:r>
             <a:endParaRPr lang="en-US" dirty="0"/>
           </a:p>
@@ -3186,7 +3190,7 @@
           <a:p>
             <a:r>
               <a:rPr lang="en-US" dirty="0"/>
-              <a:t>The expected answer is: the force of the waves breaking the rock. If you got it right, well done.</a:t>
+              <a:t>We continue with Erosional Features. On this slide we have Stack, Stump and Local examples. Write each point on a new line, with the key term first, and explain it in your own words when we revise.</a:t>
             </a:r>
             <a:endParaRPr lang="en-US" dirty="0"/>
           </a:p>
@@ -3274,7 +3278,7 @@
           <a:p>
             <a:r>
               <a:rPr lang="en-US" dirty="0"/>
-              <a:t>For those who need more practice, fill in the blanks in your exercise book. The answers are: number 1, cliff; number 2, arch; number 3, stack.</a:t>
+              <a:t>Now let us check what you have understood. Question 1: Put in order: arch, stump, cave, stack. Answer in your exercise book.</a:t>
             </a:r>
             <a:endParaRPr lang="en-US" dirty="0"/>
           </a:p>
@@ -3362,7 +3366,7 @@
           <a:p>
             <a:r>
               <a:rPr lang="en-US" dirty="0"/>
-              <a:t>For your homework: Put some sand at one end of a tray of water and make waves from one corner. Write where the sand moves. We shall correct it at the beginning of our next lesson.</a:t>
+              <a:t>The expected answer is: cave, arch, stack, stump. If you got it right, well done.</a:t>
             </a:r>
             <a:endParaRPr lang="en-US" dirty="0"/>
           </a:p>
@@ -3538,7 +3542,7 @@
           <a:p>
             <a:r>
               <a:rPr lang="en-US" dirty="0"/>
-              <a:t>Our next lesson will be on Lesson 25: Main Depositional Features of Wave Action. Thank you for your attention, and see you next time.</a:t>
+              <a:t>Now let us check what you have understood. Question 2: What is hydraulic action? Answer in your exercise book.</a:t>
             </a:r>
             <a:endParaRPr lang="en-US" dirty="0"/>
           </a:p>
@@ -3626,7 +3630,7 @@
           <a:p>
             <a:r>
               <a:rPr lang="en-US" dirty="0"/>
-              <a:t>Let us play the bilingual game. I say a word in English, and you give me the French word. Then we do the reverse.</a:t>
+              <a:t>The expected answer is: the force of the waves breaking the rock. If you got it right, well done.</a:t>
             </a:r>
             <a:endParaRPr lang="en-US" dirty="0"/>
           </a:p>
@@ -3714,7 +3718,7 @@
           <a:p>
             <a:r>
               <a:rPr lang="en-US" dirty="0"/>
-              <a:t>I record this information in the official logbook of the class after the lesson.</a:t>
+              <a:t>For those who need more practice, fill in the blanks in your exercise book. The answers are: number 1, cliff; number 2, arch; number 3, stack.</a:t>
             </a:r>
             <a:endParaRPr lang="en-US" dirty="0"/>
           </a:p>
@@ -3802,7 +3806,7 @@
           <a:p>
             <a:r>
               <a:rPr lang="en-US" dirty="0"/>
-              <a:t>I complete the second page of the logbook: the matter taught, the evaluation, the homework and the attendance.</a:t>
+              <a:t>For your homework: Put some sand at one end of a tray of water and make waves from one corner. Write where the sand moves. We shall correct it at the beginning of our next lesson.</a:t>
             </a:r>
             <a:endParaRPr lang="en-US" dirty="0"/>
           </a:p>
@@ -3890,7 +3894,7 @@
           <a:p>
             <a:r>
               <a:rPr lang="en-US" dirty="0"/>
-              <a:t>This slide is for me, the teacher: it gives the timing of the lesson and what to do if the projector is not available.</a:t>
+              <a:t>Our next lesson will be on Lesson 25: Main Depositional Features of Wave Action. Thank you for your attention, and see you next time.</a:t>
             </a:r>
             <a:endParaRPr lang="en-US" dirty="0"/>
           </a:p>
@@ -3978,7 +3982,7 @@
           <a:p>
             <a:r>
               <a:rPr lang="en-US" dirty="0"/>
-              <a:t>These are the references and picture credits used to prepare this lesson.</a:t>
+              <a:t>Let us play the bilingual game. I say a word in English, and you give me the French word. Then we do the reverse.</a:t>
             </a:r>
             <a:endParaRPr lang="en-US" dirty="0"/>
           </a:p>
@@ -4002,6 +4006,358 @@
             <a:fld id="{F7021451-1387-4CA6-816F-3879F97B5CBC}" type="slidenum">
               <a:rPr lang="en-US"/>
               <a:t>45</a:t>
+            </a:fld>
+            <a:endParaRPr lang="en-US"/>
+          </a:p>
+        </p:txBody>
+      </p:sp>
+    </p:spTree>
+    <p:extLst>
+      <p:ext uri="{BB962C8B-B14F-4D97-AF65-F5344CB8AC3E}">
+        <p14:creationId xmlns:p14="http://schemas.microsoft.com/office/powerpoint/2010/main" val="1024086991"/>
+      </p:ext>
+    </p:extLst>
+  </p:cSld>
+  <p:clrMapOvr>
+    <a:masterClrMapping/>
+  </p:clrMapOvr>
+</p:notes>
+</file>
+
+<file path=ppt/notesSlides/notesSlide46.xml><?xml version="1.0" encoding="utf-8"?>
+<p:notes xmlns:a="http://schemas.openxmlformats.org/drawingml/2006/main" xmlns:r="http://schemas.openxmlformats.org/officeDocument/2006/relationships" xmlns:p="http://schemas.openxmlformats.org/presentationml/2006/main">
+  <p:cSld>
+    <p:spTree>
+      <p:nvGrpSpPr>
+        <p:cNvPr id="1" name=""/>
+        <p:cNvGrpSpPr/>
+        <p:nvPr/>
+      </p:nvGrpSpPr>
+      <p:grpSpPr>
+        <a:xfrm>
+          <a:off x="0" y="0"/>
+          <a:ext cx="0" cy="0"/>
+          <a:chOff x="0" y="0"/>
+          <a:chExt cx="0" cy="0"/>
+        </a:xfrm>
+      </p:grpSpPr>
+      <p:sp>
+        <p:nvSpPr>
+          <p:cNvPr id="2" name="Slide Image Placeholder 1"/>
+          <p:cNvSpPr>
+            <a:spLocks noGrp="1" noRot="1" noChangeAspect="1"/>
+          </p:cNvSpPr>
+          <p:nvPr>
+            <p:ph type="sldImg"/>
+          </p:nvPr>
+        </p:nvSpPr>
+        <p:spPr/>
+      </p:sp>
+      <p:sp>
+        <p:nvSpPr>
+          <p:cNvPr id="3" name="Notes Placeholder 2"/>
+          <p:cNvSpPr>
+            <a:spLocks noGrp="1"/>
+          </p:cNvSpPr>
+          <p:nvPr>
+            <p:ph type="body" idx="1"/>
+          </p:nvPr>
+        </p:nvSpPr>
+        <p:spPr/>
+        <p:txBody>
+          <a:bodyPr/>
+          <a:lstStyle/>
+          <a:p>
+            <a:r>
+              <a:rPr lang="en-US" dirty="0"/>
+              <a:t>I record this information in the official logbook of the class after the lesson.</a:t>
+            </a:r>
+            <a:endParaRPr lang="en-US" dirty="0"/>
+          </a:p>
+        </p:txBody>
+      </p:sp>
+      <p:sp>
+        <p:nvSpPr>
+          <p:cNvPr id="4" name="Slide Number Placeholder 3"/>
+          <p:cNvSpPr>
+            <a:spLocks noGrp="1"/>
+          </p:cNvSpPr>
+          <p:nvPr>
+            <p:ph type="sldNum" sz="quarter" idx="10"/>
+          </p:nvPr>
+        </p:nvSpPr>
+        <p:spPr/>
+        <p:txBody>
+          <a:bodyPr/>
+          <a:lstStyle/>
+          <a:p>
+            <a:fld id="{F7021451-1387-4CA6-816F-3879F97B5CBC}" type="slidenum">
+              <a:rPr lang="en-US"/>
+              <a:t>46</a:t>
+            </a:fld>
+            <a:endParaRPr lang="en-US"/>
+          </a:p>
+        </p:txBody>
+      </p:sp>
+    </p:spTree>
+    <p:extLst>
+      <p:ext uri="{BB962C8B-B14F-4D97-AF65-F5344CB8AC3E}">
+        <p14:creationId xmlns:p14="http://schemas.microsoft.com/office/powerpoint/2010/main" val="1024086991"/>
+      </p:ext>
+    </p:extLst>
+  </p:cSld>
+  <p:clrMapOvr>
+    <a:masterClrMapping/>
+  </p:clrMapOvr>
+</p:notes>
+</file>
+
+<file path=ppt/notesSlides/notesSlide47.xml><?xml version="1.0" encoding="utf-8"?>
+<p:notes xmlns:a="http://schemas.openxmlformats.org/drawingml/2006/main" xmlns:r="http://schemas.openxmlformats.org/officeDocument/2006/relationships" xmlns:p="http://schemas.openxmlformats.org/presentationml/2006/main">
+  <p:cSld>
+    <p:spTree>
+      <p:nvGrpSpPr>
+        <p:cNvPr id="1" name=""/>
+        <p:cNvGrpSpPr/>
+        <p:nvPr/>
+      </p:nvGrpSpPr>
+      <p:grpSpPr>
+        <a:xfrm>
+          <a:off x="0" y="0"/>
+          <a:ext cx="0" cy="0"/>
+          <a:chOff x="0" y="0"/>
+          <a:chExt cx="0" cy="0"/>
+        </a:xfrm>
+      </p:grpSpPr>
+      <p:sp>
+        <p:nvSpPr>
+          <p:cNvPr id="2" name="Slide Image Placeholder 1"/>
+          <p:cNvSpPr>
+            <a:spLocks noGrp="1" noRot="1" noChangeAspect="1"/>
+          </p:cNvSpPr>
+          <p:nvPr>
+            <p:ph type="sldImg"/>
+          </p:nvPr>
+        </p:nvSpPr>
+        <p:spPr/>
+      </p:sp>
+      <p:sp>
+        <p:nvSpPr>
+          <p:cNvPr id="3" name="Notes Placeholder 2"/>
+          <p:cNvSpPr>
+            <a:spLocks noGrp="1"/>
+          </p:cNvSpPr>
+          <p:nvPr>
+            <p:ph type="body" idx="1"/>
+          </p:nvPr>
+        </p:nvSpPr>
+        <p:spPr/>
+        <p:txBody>
+          <a:bodyPr/>
+          <a:lstStyle/>
+          <a:p>
+            <a:r>
+              <a:rPr lang="en-US" dirty="0"/>
+              <a:t>I complete the second page of the logbook: the matter taught, the evaluation, the homework and the attendance.</a:t>
+            </a:r>
+            <a:endParaRPr lang="en-US" dirty="0"/>
+          </a:p>
+        </p:txBody>
+      </p:sp>
+      <p:sp>
+        <p:nvSpPr>
+          <p:cNvPr id="4" name="Slide Number Placeholder 3"/>
+          <p:cNvSpPr>
+            <a:spLocks noGrp="1"/>
+          </p:cNvSpPr>
+          <p:nvPr>
+            <p:ph type="sldNum" sz="quarter" idx="10"/>
+          </p:nvPr>
+        </p:nvSpPr>
+        <p:spPr/>
+        <p:txBody>
+          <a:bodyPr/>
+          <a:lstStyle/>
+          <a:p>
+            <a:fld id="{F7021451-1387-4CA6-816F-3879F97B5CBC}" type="slidenum">
+              <a:rPr lang="en-US"/>
+              <a:t>47</a:t>
+            </a:fld>
+            <a:endParaRPr lang="en-US"/>
+          </a:p>
+        </p:txBody>
+      </p:sp>
+    </p:spTree>
+    <p:extLst>
+      <p:ext uri="{BB962C8B-B14F-4D97-AF65-F5344CB8AC3E}">
+        <p14:creationId xmlns:p14="http://schemas.microsoft.com/office/powerpoint/2010/main" val="1024086991"/>
+      </p:ext>
+    </p:extLst>
+  </p:cSld>
+  <p:clrMapOvr>
+    <a:masterClrMapping/>
+  </p:clrMapOvr>
+</p:notes>
+</file>
+
+<file path=ppt/notesSlides/notesSlide48.xml><?xml version="1.0" encoding="utf-8"?>
+<p:notes xmlns:a="http://schemas.openxmlformats.org/drawingml/2006/main" xmlns:r="http://schemas.openxmlformats.org/officeDocument/2006/relationships" xmlns:p="http://schemas.openxmlformats.org/presentationml/2006/main">
+  <p:cSld>
+    <p:spTree>
+      <p:nvGrpSpPr>
+        <p:cNvPr id="1" name=""/>
+        <p:cNvGrpSpPr/>
+        <p:nvPr/>
+      </p:nvGrpSpPr>
+      <p:grpSpPr>
+        <a:xfrm>
+          <a:off x="0" y="0"/>
+          <a:ext cx="0" cy="0"/>
+          <a:chOff x="0" y="0"/>
+          <a:chExt cx="0" cy="0"/>
+        </a:xfrm>
+      </p:grpSpPr>
+      <p:sp>
+        <p:nvSpPr>
+          <p:cNvPr id="2" name="Slide Image Placeholder 1"/>
+          <p:cNvSpPr>
+            <a:spLocks noGrp="1" noRot="1" noChangeAspect="1"/>
+          </p:cNvSpPr>
+          <p:nvPr>
+            <p:ph type="sldImg"/>
+          </p:nvPr>
+        </p:nvSpPr>
+        <p:spPr/>
+      </p:sp>
+      <p:sp>
+        <p:nvSpPr>
+          <p:cNvPr id="3" name="Notes Placeholder 2"/>
+          <p:cNvSpPr>
+            <a:spLocks noGrp="1"/>
+          </p:cNvSpPr>
+          <p:nvPr>
+            <p:ph type="body" idx="1"/>
+          </p:nvPr>
+        </p:nvSpPr>
+        <p:spPr/>
+        <p:txBody>
+          <a:bodyPr/>
+          <a:lstStyle/>
+          <a:p>
+            <a:r>
+              <a:rPr lang="en-US" dirty="0"/>
+              <a:t>This slide is for me, the teacher: it gives the timing of the lesson and what to do if the projector is not available.</a:t>
+            </a:r>
+            <a:endParaRPr lang="en-US" dirty="0"/>
+          </a:p>
+        </p:txBody>
+      </p:sp>
+      <p:sp>
+        <p:nvSpPr>
+          <p:cNvPr id="4" name="Slide Number Placeholder 3"/>
+          <p:cNvSpPr>
+            <a:spLocks noGrp="1"/>
+          </p:cNvSpPr>
+          <p:nvPr>
+            <p:ph type="sldNum" sz="quarter" idx="10"/>
+          </p:nvPr>
+        </p:nvSpPr>
+        <p:spPr/>
+        <p:txBody>
+          <a:bodyPr/>
+          <a:lstStyle/>
+          <a:p>
+            <a:fld id="{F7021451-1387-4CA6-816F-3879F97B5CBC}" type="slidenum">
+              <a:rPr lang="en-US"/>
+              <a:t>48</a:t>
+            </a:fld>
+            <a:endParaRPr lang="en-US"/>
+          </a:p>
+        </p:txBody>
+      </p:sp>
+    </p:spTree>
+    <p:extLst>
+      <p:ext uri="{BB962C8B-B14F-4D97-AF65-F5344CB8AC3E}">
+        <p14:creationId xmlns:p14="http://schemas.microsoft.com/office/powerpoint/2010/main" val="1024086991"/>
+      </p:ext>
+    </p:extLst>
+  </p:cSld>
+  <p:clrMapOvr>
+    <a:masterClrMapping/>
+  </p:clrMapOvr>
+</p:notes>
+</file>
+
+<file path=ppt/notesSlides/notesSlide49.xml><?xml version="1.0" encoding="utf-8"?>
+<p:notes xmlns:a="http://schemas.openxmlformats.org/drawingml/2006/main" xmlns:r="http://schemas.openxmlformats.org/officeDocument/2006/relationships" xmlns:p="http://schemas.openxmlformats.org/presentationml/2006/main">
+  <p:cSld>
+    <p:spTree>
+      <p:nvGrpSpPr>
+        <p:cNvPr id="1" name=""/>
+        <p:cNvGrpSpPr/>
+        <p:nvPr/>
+      </p:nvGrpSpPr>
+      <p:grpSpPr>
+        <a:xfrm>
+          <a:off x="0" y="0"/>
+          <a:ext cx="0" cy="0"/>
+          <a:chOff x="0" y="0"/>
+          <a:chExt cx="0" cy="0"/>
+        </a:xfrm>
+      </p:grpSpPr>
+      <p:sp>
+        <p:nvSpPr>
+          <p:cNvPr id="2" name="Slide Image Placeholder 1"/>
+          <p:cNvSpPr>
+            <a:spLocks noGrp="1" noRot="1" noChangeAspect="1"/>
+          </p:cNvSpPr>
+          <p:nvPr>
+            <p:ph type="sldImg"/>
+          </p:nvPr>
+        </p:nvSpPr>
+        <p:spPr/>
+      </p:sp>
+      <p:sp>
+        <p:nvSpPr>
+          <p:cNvPr id="3" name="Notes Placeholder 2"/>
+          <p:cNvSpPr>
+            <a:spLocks noGrp="1"/>
+          </p:cNvSpPr>
+          <p:nvPr>
+            <p:ph type="body" idx="1"/>
+          </p:nvPr>
+        </p:nvSpPr>
+        <p:spPr/>
+        <p:txBody>
+          <a:bodyPr/>
+          <a:lstStyle/>
+          <a:p>
+            <a:r>
+              <a:rPr lang="en-US" dirty="0"/>
+              <a:t>These are the references and picture credits used to prepare this lesson.</a:t>
+            </a:r>
+            <a:endParaRPr lang="en-US" dirty="0"/>
+          </a:p>
+        </p:txBody>
+      </p:sp>
+      <p:sp>
+        <p:nvSpPr>
+          <p:cNvPr id="4" name="Slide Number Placeholder 3"/>
+          <p:cNvSpPr>
+            <a:spLocks noGrp="1"/>
+          </p:cNvSpPr>
+          <p:nvPr>
+            <p:ph type="sldNum" sz="quarter" idx="10"/>
+          </p:nvPr>
+        </p:nvSpPr>
+        <p:spPr/>
+        <p:txBody>
+          <a:bodyPr/>
+          <a:lstStyle/>
+          <a:p>
+            <a:fld id="{F7021451-1387-4CA6-816F-3879F97B5CBC}" type="slidenum">
+              <a:rPr lang="en-US"/>
+              <a:t>49</a:t>
             </a:fld>
             <a:endParaRPr lang="en-US"/>
           </a:p>
@@ -5798,7 +6154,7 @@
         <p:spPr>
           <a:xfrm>
             <a:off x="0" y="658368"/>
-            <a:ext cx="5120640" cy="5833872"/>
+            <a:ext cx="2468880" cy="5833872"/>
           </a:xfrm>
           <a:prstGeom prst="rect">
             <a:avLst/>
@@ -5813,8 +6169,8 @@
         </p:nvSpPr>
         <p:spPr>
           <a:xfrm>
-            <a:off x="5349240" y="1005840"/>
-            <a:ext cx="6522415" cy="731520"/>
+            <a:off x="2697480" y="1005840"/>
+            <a:ext cx="9174175" cy="731520"/>
           </a:xfrm>
           <a:prstGeom prst="rect">
             <a:avLst/>
@@ -5854,8 +6210,8 @@
         </p:nvSpPr>
         <p:spPr>
           <a:xfrm>
-            <a:off x="5349240" y="1783080"/>
-            <a:ext cx="6522415" cy="4663440"/>
+            <a:off x="2697480" y="1783080"/>
+            <a:ext cx="9174175" cy="4663440"/>
           </a:xfrm>
           <a:prstGeom prst="rect">
             <a:avLst/>
@@ -5882,7 +6238,7 @@
                 <a:ea typeface="Times New Roman" pitchFamily="34" charset="-122"/>
                 <a:cs typeface="Times New Roman" pitchFamily="34" charset="-120"/>
               </a:rPr>
-              <a:t>On holiday in Limbe, Rahila sees big waves crash against the rocky coast. At the bottom of a rock face, the waves have cut a hollow and small caves.</a:t>
+              <a:t>On holiday in Limbe, Rahila sees big waves crash against the rocky coast. At the bottom of a rock face, the waves have cut a hollow and small caves, and a rock stands alone in the sea. She asks: "How can water cut such hard rock, and what shapes does it make?"</a:t>
             </a:r>
             <a:endParaRPr lang="en-US" sz="4000" dirty="0"/>
           </a:p>
@@ -6320,7 +6676,7 @@
                 <a:ea typeface="Times New Roman" pitchFamily="34" charset="-122"/>
                 <a:cs typeface="Times New Roman" pitchFamily="34" charset="-120"/>
               </a:rPr>
-              <a:t>Rahila wonders how waves can cut hard rock.</a:t>
+              <a:t>Rahila does not understand how waves cut rock and what features they form.</a:t>
             </a:r>
             <a:endParaRPr lang="en-US" sz="4000" dirty="0"/>
           </a:p>
@@ -6539,7 +6895,7 @@
                 <a:ea typeface="Times New Roman" pitchFamily="34" charset="-122"/>
                 <a:cs typeface="Times New Roman" pitchFamily="34" charset="-120"/>
               </a:rPr>
-              <a:t>What did the waves make?</a:t>
+              <a:t>What did the waves cut at the bottom of the rock face?</a:t>
             </a:r>
             <a:endParaRPr lang="en-US" sz="4000" dirty="0"/>
           </a:p>
@@ -6977,7 +7333,7 @@
                 <a:ea typeface="Times New Roman" pitchFamily="34" charset="-122"/>
                 <a:cs typeface="Times New Roman" pitchFamily="34" charset="-120"/>
               </a:rPr>
-              <a:t>What will happen to the caves after many years?</a:t>
+              <a:t>What stands alone in the sea?</a:t>
             </a:r>
             <a:endParaRPr lang="en-US" sz="4000" dirty="0"/>
           </a:p>
@@ -7196,7 +7552,7 @@
                 <a:ea typeface="Times New Roman" pitchFamily="34" charset="-122"/>
                 <a:cs typeface="Times New Roman" pitchFamily="34" charset="-120"/>
               </a:rPr>
-              <a:t>They will become arches and then stacks.</a:t>
+              <a:t>A rock: a stack.</a:t>
             </a:r>
             <a:endParaRPr lang="en-US" sz="4000" dirty="0"/>
           </a:p>
@@ -7746,7 +8102,7 @@
                 <a:ea typeface="Calibri" pitchFamily="34" charset="-122"/>
                 <a:cs typeface="Calibri" pitchFamily="34" charset="-120"/>
               </a:rPr>
-              <a:t>2. CLIFFS</a:t>
+              <a:t>2. EROSIONAL FEATURES</a:t>
             </a:r>
             <a:endParaRPr lang="en-US" sz="1400" dirty="0"/>
           </a:p>
@@ -7848,7 +8204,7 @@
                 <a:ea typeface="Times New Roman" pitchFamily="34" charset="-122"/>
                 <a:cs typeface="Times New Roman" pitchFamily="34" charset="-120"/>
               </a:rPr>
-              <a:t>Waves hit a cliff.</a:t>
+              <a:t>A steep rock face on the coast.</a:t>
             </a:r>
             <a:endParaRPr lang="en-US" sz="1800" dirty="0"/>
           </a:p>
@@ -8555,7 +8911,7 @@
                 <a:ea typeface="Calibri" pitchFamily="34" charset="-122"/>
                 <a:cs typeface="Calibri" pitchFamily="34" charset="-120"/>
               </a:rPr>
-              <a:t>2. CLIFFS</a:t>
+              <a:t>2. EROSIONAL FEATURES</a:t>
             </a:r>
             <a:endParaRPr lang="en-US" sz="1400" dirty="0"/>
           </a:p>
@@ -8774,7 +9130,7 @@
                 <a:ea typeface="Calibri" pitchFamily="34" charset="-122"/>
                 <a:cs typeface="Calibri" pitchFamily="34" charset="-120"/>
               </a:rPr>
-              <a:t>2. CLIFFS</a:t>
+              <a:t>2. EROSIONAL FEATURES</a:t>
             </a:r>
             <a:endParaRPr lang="en-US" sz="1400" dirty="0"/>
           </a:p>
@@ -8881,7 +9237,7 @@
                 <a:ea typeface="Times New Roman" pitchFamily="34" charset="-122"/>
                 <a:cs typeface="Times New Roman" pitchFamily="34" charset="-120"/>
               </a:rPr>
-              <a:t>They cut the bottom of the rock; the top falls; a steep cliff is left.</a:t>
+              <a:t>They cut the bottom of the rock, the top falls, and a steep cliff is left.</a:t>
             </a:r>
             <a:endParaRPr lang="en-US" sz="4000" dirty="0"/>
           </a:p>
@@ -8993,7 +9349,7 @@
                 <a:ea typeface="Calibri" pitchFamily="34" charset="-122"/>
                 <a:cs typeface="Calibri" pitchFamily="34" charset="-120"/>
               </a:rPr>
-              <a:t>2. CAVE, ARCH AND STACK</a:t>
+              <a:t>2. EROSIONAL FEATURES</a:t>
             </a:r>
             <a:endParaRPr lang="en-US" sz="1400" dirty="0"/>
           </a:p>
@@ -9095,7 +9451,7 @@
                 <a:ea typeface="Times New Roman" pitchFamily="34" charset="-122"/>
                 <a:cs typeface="Times New Roman" pitchFamily="34" charset="-120"/>
               </a:rPr>
-              <a:t>Animation: a headland is worn away.</a:t>
+              <a:t>Animation: erosion of a headland.</a:t>
             </a:r>
             <a:endParaRPr lang="en-US" sz="1800" dirty="0"/>
           </a:p>
@@ -9207,7 +9563,7 @@
                 <a:ea typeface="Calibri" pitchFamily="34" charset="-122"/>
                 <a:cs typeface="Calibri" pitchFamily="34" charset="-120"/>
               </a:rPr>
-              <a:t>2. CAVE, ARCH AND STACK</a:t>
+              <a:t>2. EROSIONAL FEATURES</a:t>
             </a:r>
             <a:endParaRPr lang="en-US" sz="1400" dirty="0"/>
           </a:p>
@@ -9314,7 +9670,7 @@
                 <a:ea typeface="Times New Roman" pitchFamily="34" charset="-122"/>
                 <a:cs typeface="Times New Roman" pitchFamily="34" charset="-120"/>
               </a:rPr>
-              <a:t>Put in order: stack, cave, stump, arch.</a:t>
+              <a:t>Put these features in order: stack, cave, stump, arch.</a:t>
             </a:r>
             <a:endParaRPr lang="en-US" sz="4000" dirty="0"/>
           </a:p>
@@ -9426,7 +9782,7 @@
                 <a:ea typeface="Calibri" pitchFamily="34" charset="-122"/>
                 <a:cs typeface="Calibri" pitchFamily="34" charset="-120"/>
               </a:rPr>
-              <a:t>2. CAVE, ARCH AND STACK</a:t>
+              <a:t>2. EROSIONAL FEATURES</a:t>
             </a:r>
             <a:endParaRPr lang="en-US" sz="1400" dirty="0"/>
           </a:p>
@@ -9645,7 +10001,7 @@
                 <a:ea typeface="Calibri" pitchFamily="34" charset="-122"/>
                 <a:cs typeface="Calibri" pitchFamily="34" charset="-120"/>
               </a:rPr>
-              <a:t>2. CAVE, ARCH AND STACK</a:t>
+              <a:t>2. EROSIONAL FEATURES</a:t>
             </a:r>
             <a:endParaRPr lang="en-US" sz="1400" dirty="0"/>
           </a:p>
@@ -9747,7 +10103,7 @@
                 <a:ea typeface="Times New Roman" pitchFamily="34" charset="-122"/>
                 <a:cs typeface="Times New Roman" pitchFamily="34" charset="-120"/>
               </a:rPr>
-              <a:t>A rock with a hole through it, on the coast.</a:t>
+              <a:t>A hole through a rock on the coast.</a:t>
             </a:r>
             <a:endParaRPr lang="en-US" sz="1800" dirty="0"/>
           </a:p>
@@ -9859,7 +10215,7 @@
                 <a:ea typeface="Calibri" pitchFamily="34" charset="-122"/>
                 <a:cs typeface="Calibri" pitchFamily="34" charset="-120"/>
               </a:rPr>
-              <a:t>2. CAVE, ARCH AND STACK</a:t>
+              <a:t>2. EROSIONAL FEATURES</a:t>
             </a:r>
             <a:endParaRPr lang="en-US" sz="1400" dirty="0"/>
           </a:p>
@@ -10078,7 +10434,7 @@
                 <a:ea typeface="Calibri" pitchFamily="34" charset="-122"/>
                 <a:cs typeface="Calibri" pitchFamily="34" charset="-120"/>
               </a:rPr>
-              <a:t>2. CAVE, ARCH AND STACK</a:t>
+              <a:t>2. EROSIONAL FEATURES</a:t>
             </a:r>
             <a:endParaRPr lang="en-US" sz="1400" dirty="0"/>
           </a:p>
@@ -10396,7 +10752,7 @@
               <a:buNone/>
             </a:pPr>
             <a:r>
-              <a:rPr lang="en-US" sz="4000" b="1" dirty="0">
+              <a:rPr lang="en-US" sz="3200" b="1" dirty="0">
                 <a:solidFill>
                   <a:srgbClr val="111111"/>
                 </a:solidFill>
@@ -10406,7 +10762,7 @@
               </a:rPr>
               <a:t>Topic: Denudation Processes, Landforms and Impacts on Man</a:t>
             </a:r>
-            <a:endParaRPr lang="en-US" sz="4000" dirty="0"/>
+            <a:endParaRPr lang="en-US" sz="3200" dirty="0"/>
           </a:p>
           <a:p>
             <a:pPr algn="l" indent="0" marL="0">
@@ -10416,7 +10772,7 @@
               <a:buNone/>
             </a:pPr>
             <a:r>
-              <a:rPr lang="en-US" sz="4000" b="1" dirty="0">
+              <a:rPr lang="en-US" sz="3200" b="1" dirty="0">
                 <a:solidFill>
                   <a:srgbClr val="111111"/>
                 </a:solidFill>
@@ -10426,7 +10782,7 @@
               </a:rPr>
               <a:t>Sub-topic: Wave Action along the Coast and Impacts on Man</a:t>
             </a:r>
-            <a:endParaRPr lang="en-US" sz="4000" dirty="0"/>
+            <a:endParaRPr lang="en-US" sz="3200" dirty="0"/>
           </a:p>
           <a:p>
             <a:pPr algn="l" indent="0" marL="0">
@@ -10436,7 +10792,7 @@
               <a:buNone/>
             </a:pPr>
             <a:r>
-              <a:rPr lang="en-US" sz="4000" b="1" dirty="0">
+              <a:rPr lang="en-US" sz="3200" b="1" dirty="0">
                 <a:solidFill>
                   <a:srgbClr val="990011"/>
                 </a:solidFill>
@@ -10446,7 +10802,7 @@
               </a:rPr>
               <a:t>Lesson 24: Main Erosional Processes and Features of Wave Action</a:t>
             </a:r>
-            <a:endParaRPr lang="en-US" sz="4000" dirty="0"/>
+            <a:endParaRPr lang="en-US" sz="3200" dirty="0"/>
           </a:p>
         </p:txBody>
       </p:sp>
@@ -10579,7 +10935,7 @@
         <p:spPr>
           <a:xfrm>
             <a:off x="0" y="658368"/>
-            <a:ext cx="3840480" cy="5833872"/>
+            <a:ext cx="2468880" cy="5833872"/>
           </a:xfrm>
           <a:prstGeom prst="rect">
             <a:avLst/>
@@ -10594,8 +10950,8 @@
         </p:nvSpPr>
         <p:spPr>
           <a:xfrm>
-            <a:off x="4069080" y="1005840"/>
-            <a:ext cx="7802575" cy="731520"/>
+            <a:off x="2697480" y="1005840"/>
+            <a:ext cx="9174175" cy="731520"/>
           </a:xfrm>
           <a:prstGeom prst="rect">
             <a:avLst/>
@@ -10621,7 +10977,7 @@
                 <a:ea typeface="Times New Roman" pitchFamily="34" charset="-122"/>
                 <a:cs typeface="Times New Roman" pitchFamily="34" charset="-120"/>
               </a:rPr>
-              <a:t>1. Erosional Processes of Waves</a:t>
+              <a:t>DEFINITIONS</a:t>
             </a:r>
             <a:endParaRPr lang="en-US" sz="3600" dirty="0"/>
           </a:p>
@@ -10635,8 +10991,8 @@
         </p:nvSpPr>
         <p:spPr>
           <a:xfrm>
-            <a:off x="4069080" y="1783080"/>
-            <a:ext cx="7802575" cy="4663440"/>
+            <a:off x="2697480" y="1783080"/>
+            <a:ext cx="9174175" cy="4663440"/>
           </a:xfrm>
           <a:prstGeom prst="rect">
             <a:avLst/>
@@ -10663,7 +11019,7 @@
                 <a:ea typeface="Times New Roman" pitchFamily="34" charset="-122"/>
                 <a:cs typeface="Times New Roman" pitchFamily="34" charset="-120"/>
               </a:rPr>
-              <a:t>Waves erode the coast through the following processes:</a:t>
+              <a:t>The key terms of this lesson are defined as follows:</a:t>
             </a:r>
             <a:endParaRPr lang="en-US" sz="4000" dirty="0"/>
           </a:p>
@@ -10683,7 +11039,7 @@
                 <a:ea typeface="Times New Roman" pitchFamily="34" charset="-122"/>
                 <a:cs typeface="Times New Roman" pitchFamily="34" charset="-120"/>
               </a:rPr>
-              <a:t>Hydraulic action: </a:t>
+              <a:t>Wave erosion: </a:t>
             </a:r>
             <a:pPr algn="l" indent="0" marL="0">
               <a:spcAft>
@@ -10700,7 +11056,7 @@
                 <a:ea typeface="Times New Roman" pitchFamily="34" charset="-122"/>
                 <a:cs typeface="Times New Roman" pitchFamily="34" charset="-120"/>
               </a:rPr>
-              <a:t>The force of the waves compresses air in cracks and breaks the rock.</a:t>
+              <a:t>It is the wearing away of the coast by the action of waves.</a:t>
             </a:r>
             <a:endParaRPr lang="en-US" sz="4000" dirty="0"/>
           </a:p>
@@ -10720,7 +11076,7 @@
                 <a:ea typeface="Times New Roman" pitchFamily="34" charset="-122"/>
                 <a:cs typeface="Times New Roman" pitchFamily="34" charset="-120"/>
               </a:rPr>
-              <a:t>Abrasion: </a:t>
+              <a:t>Headland (cape): </a:t>
             </a:r>
             <a:pPr algn="l" indent="0" marL="0">
               <a:spcAft>
@@ -10737,7 +11093,7 @@
                 <a:ea typeface="Times New Roman" pitchFamily="34" charset="-122"/>
                 <a:cs typeface="Times New Roman" pitchFamily="34" charset="-120"/>
               </a:rPr>
-              <a:t>Stones thrown by the waves wear away the cliff.</a:t>
+              <a:t>It is a part of the land that sticks out into the sea.</a:t>
             </a:r>
             <a:endParaRPr lang="en-US" sz="4000" dirty="0"/>
           </a:p>
@@ -11923,7 +12279,7 @@
                 <a:ea typeface="Times New Roman" pitchFamily="34" charset="-122"/>
                 <a:cs typeface="Times New Roman" pitchFamily="34" charset="-120"/>
               </a:rPr>
-              <a:t>1. Erosional Processes of Waves (continued)</a:t>
+              <a:t>DEFINITIONS (continued)</a:t>
             </a:r>
             <a:endParaRPr lang="en-US" sz="3600" dirty="0"/>
           </a:p>
@@ -11965,7 +12321,7 @@
                 <a:ea typeface="Times New Roman" pitchFamily="34" charset="-122"/>
                 <a:cs typeface="Times New Roman" pitchFamily="34" charset="-120"/>
               </a:rPr>
-              <a:t>Attrition: </a:t>
+              <a:t>Bay: </a:t>
             </a:r>
             <a:pPr algn="l" indent="0" marL="0">
               <a:spcAft>
@@ -11982,44 +12338,7 @@
                 <a:ea typeface="Times New Roman" pitchFamily="34" charset="-122"/>
                 <a:cs typeface="Times New Roman" pitchFamily="34" charset="-120"/>
               </a:rPr>
-              <a:t>Stones hit each other and become small and round.</a:t>
-            </a:r>
-            <a:endParaRPr lang="en-US" sz="4000" dirty="0"/>
-          </a:p>
-          <a:p>
-            <a:pPr algn="l" indent="0" marL="0">
-              <a:spcAft>
-                <a:spcPts val="800"/>
-              </a:spcAft>
-              <a:buNone/>
-            </a:pPr>
-            <a:r>
-              <a:rPr lang="en-US" sz="4000" b="1" dirty="0">
-                <a:solidFill>
-                  <a:srgbClr val="111111"/>
-                </a:solidFill>
-                <a:latin typeface="Times New Roman" pitchFamily="34" charset="0"/>
-                <a:ea typeface="Times New Roman" pitchFamily="34" charset="-122"/>
-                <a:cs typeface="Times New Roman" pitchFamily="34" charset="-120"/>
-              </a:rPr>
-              <a:t>Solution: </a:t>
-            </a:r>
-            <a:pPr algn="l" indent="0" marL="0">
-              <a:spcAft>
-                <a:spcPts val="800"/>
-              </a:spcAft>
-              <a:buNone/>
-            </a:pPr>
-            <a:r>
-              <a:rPr lang="en-US" sz="4000" dirty="0">
-                <a:solidFill>
-                  <a:srgbClr val="111111"/>
-                </a:solidFill>
-                <a:latin typeface="Times New Roman" pitchFamily="34" charset="0"/>
-                <a:ea typeface="Times New Roman" pitchFamily="34" charset="-122"/>
-                <a:cs typeface="Times New Roman" pitchFamily="34" charset="-120"/>
-              </a:rPr>
-              <a:t>Sea water dissolves some rocks, such as limestone.</a:t>
+              <a:t>It is a part of the sea that curves into the land between two headlands.</a:t>
             </a:r>
             <a:endParaRPr lang="en-US" sz="4000" dirty="0"/>
           </a:p>
@@ -12154,7 +12473,7 @@
         <p:spPr>
           <a:xfrm>
             <a:off x="0" y="658368"/>
-            <a:ext cx="1463040" cy="5833872"/>
+            <a:ext cx="2468880" cy="5833872"/>
           </a:xfrm>
           <a:prstGeom prst="rect">
             <a:avLst/>
@@ -12169,8 +12488,8 @@
         </p:nvSpPr>
         <p:spPr>
           <a:xfrm>
-            <a:off x="1691640" y="1005840"/>
-            <a:ext cx="10180015" cy="731520"/>
+            <a:off x="2697480" y="1005840"/>
+            <a:ext cx="9174175" cy="731520"/>
           </a:xfrm>
           <a:prstGeom prst="rect">
             <a:avLst/>
@@ -12196,7 +12515,7 @@
                 <a:ea typeface="Times New Roman" pitchFamily="34" charset="-122"/>
                 <a:cs typeface="Times New Roman" pitchFamily="34" charset="-120"/>
               </a:rPr>
-              <a:t>2. Erosional Features</a:t>
+              <a:t>1. Erosional Processes of Waves</a:t>
             </a:r>
             <a:endParaRPr lang="en-US" sz="3600" dirty="0"/>
           </a:p>
@@ -12210,8 +12529,8 @@
         </p:nvSpPr>
         <p:spPr>
           <a:xfrm>
-            <a:off x="1691640" y="1783080"/>
-            <a:ext cx="10180015" cy="4663440"/>
+            <a:off x="2697480" y="1783080"/>
+            <a:ext cx="9174175" cy="4663440"/>
           </a:xfrm>
           <a:prstGeom prst="rect">
             <a:avLst/>
@@ -12238,7 +12557,7 @@
                 <a:ea typeface="Times New Roman" pitchFamily="34" charset="-122"/>
                 <a:cs typeface="Times New Roman" pitchFamily="34" charset="-120"/>
               </a:rPr>
-              <a:t>Wave erosion forms the following features:</a:t>
+              <a:t>Waves erode the coast through the following processes:</a:t>
             </a:r>
             <a:endParaRPr lang="en-US" sz="4000" dirty="0"/>
           </a:p>
@@ -12258,7 +12577,7 @@
                 <a:ea typeface="Times New Roman" pitchFamily="34" charset="-122"/>
                 <a:cs typeface="Times New Roman" pitchFamily="34" charset="-120"/>
               </a:rPr>
-              <a:t>Capes and bays: </a:t>
+              <a:t>Hydraulic action: </a:t>
             </a:r>
             <a:pPr algn="l" indent="0" marL="0">
               <a:spcAft>
@@ -12275,7 +12594,7 @@
                 <a:ea typeface="Times New Roman" pitchFamily="34" charset="-122"/>
                 <a:cs typeface="Times New Roman" pitchFamily="34" charset="-120"/>
               </a:rPr>
-              <a:t>Hard rock remains as capes while soft rock is worn back into bays.</a:t>
+              <a:t>The force of the waves compresses air in cracks, and the pressure breaks the rock.</a:t>
             </a:r>
             <a:endParaRPr lang="en-US" sz="4000" dirty="0"/>
           </a:p>
@@ -12295,7 +12614,7 @@
                 <a:ea typeface="Times New Roman" pitchFamily="34" charset="-122"/>
                 <a:cs typeface="Times New Roman" pitchFamily="34" charset="-120"/>
               </a:rPr>
-              <a:t>Cliff and wave-cut platform: </a:t>
+              <a:t>Abrasion (corrasion): </a:t>
             </a:r>
             <a:pPr algn="l" indent="0" marL="0">
               <a:spcAft>
@@ -12312,7 +12631,7 @@
                 <a:ea typeface="Times New Roman" pitchFamily="34" charset="-122"/>
                 <a:cs typeface="Times New Roman" pitchFamily="34" charset="-120"/>
               </a:rPr>
-              <a:t>Waves cut the bottom of the rock, the top collapses and a flat platform is left.</a:t>
+              <a:t>Stones and sand thrown by the waves wear away the cliff.</a:t>
             </a:r>
             <a:endParaRPr lang="en-US" sz="4000" dirty="0"/>
           </a:p>
@@ -12489,7 +12808,7 @@
                 <a:ea typeface="Times New Roman" pitchFamily="34" charset="-122"/>
                 <a:cs typeface="Times New Roman" pitchFamily="34" charset="-120"/>
               </a:rPr>
-              <a:t>2. Erosional Features (continued)</a:t>
+              <a:t>1. Erosional Processes of Waves (continued)</a:t>
             </a:r>
             <a:endParaRPr lang="en-US" sz="3600" dirty="0"/>
           </a:p>
@@ -12531,7 +12850,7 @@
                 <a:ea typeface="Times New Roman" pitchFamily="34" charset="-122"/>
                 <a:cs typeface="Times New Roman" pitchFamily="34" charset="-120"/>
               </a:rPr>
-              <a:t>Cave, arch, stack and stump: </a:t>
+              <a:t>Attrition: </a:t>
             </a:r>
             <a:pPr algn="l" indent="0" marL="0">
               <a:spcAft>
@@ -12548,7 +12867,44 @@
                 <a:ea typeface="Times New Roman" pitchFamily="34" charset="-122"/>
                 <a:cs typeface="Times New Roman" pitchFamily="34" charset="-120"/>
               </a:rPr>
-              <a:t>A cave is enlarged into an arch, the arch collapses into a stack, and the stack is worn down into a stump.</a:t>
+              <a:t>Stones carried by the waves hit one another and become small and round.</a:t>
+            </a:r>
+            <a:endParaRPr lang="en-US" sz="4000" dirty="0"/>
+          </a:p>
+          <a:p>
+            <a:pPr algn="l" indent="0" marL="0">
+              <a:spcAft>
+                <a:spcPts val="800"/>
+              </a:spcAft>
+              <a:buNone/>
+            </a:pPr>
+            <a:r>
+              <a:rPr lang="en-US" sz="4000" b="1" dirty="0">
+                <a:solidFill>
+                  <a:srgbClr val="111111"/>
+                </a:solidFill>
+                <a:latin typeface="Times New Roman" pitchFamily="34" charset="0"/>
+                <a:ea typeface="Times New Roman" pitchFamily="34" charset="-122"/>
+                <a:cs typeface="Times New Roman" pitchFamily="34" charset="-120"/>
+              </a:rPr>
+              <a:t>Solution (corrosion): </a:t>
+            </a:r>
+            <a:pPr algn="l" indent="0" marL="0">
+              <a:spcAft>
+                <a:spcPts val="800"/>
+              </a:spcAft>
+              <a:buNone/>
+            </a:pPr>
+            <a:r>
+              <a:rPr lang="en-US" sz="4000" dirty="0">
+                <a:solidFill>
+                  <a:srgbClr val="111111"/>
+                </a:solidFill>
+                <a:latin typeface="Times New Roman" pitchFamily="34" charset="0"/>
+                <a:ea typeface="Times New Roman" pitchFamily="34" charset="-122"/>
+                <a:cs typeface="Times New Roman" pitchFamily="34" charset="-120"/>
+              </a:rPr>
+              <a:t>Sea water dissolves some rocks, such as limestone.</a:t>
             </a:r>
             <a:endParaRPr lang="en-US" sz="4000" dirty="0"/>
           </a:p>
@@ -12674,8 +13030,8 @@
         </p:nvSpPr>
         <p:spPr>
           <a:xfrm>
-            <a:off x="457200" y="1005840"/>
-            <a:ext cx="11277295" cy="731520"/>
+            <a:off x="365760" y="1005840"/>
+            <a:ext cx="11460175" cy="731520"/>
           </a:xfrm>
           <a:prstGeom prst="rect">
             <a:avLst/>
@@ -12684,7 +13040,9 @@
           <a:ln/>
         </p:spPr>
         <p:txBody>
-          <a:bodyPr wrap="square" lIns="0" tIns="0" rIns="0" bIns="0" rtlCol="0" anchor="ctr"/>
+          <a:bodyPr wrap="square" lIns="0" tIns="0" rIns="0" bIns="0" rtlCol="0" anchor="ctr">
+            <a:normAutofit/>
+          </a:bodyPr>
           <a:lstStyle/>
           <a:p>
             <a:pPr algn="ctr" indent="0" marL="0">
@@ -12705,9 +13063,88 @@
           </a:p>
         </p:txBody>
       </p:sp>
+      <p:sp>
+        <p:nvSpPr>
+          <p:cNvPr id="4" name="Text 2"/>
+          <p:cNvSpPr/>
+          <p:nvPr/>
+        </p:nvSpPr>
+        <p:spPr>
+          <a:xfrm>
+            <a:off x="365760" y="1783080"/>
+            <a:ext cx="4846320" cy="4617720"/>
+          </a:xfrm>
+          <a:prstGeom prst="rect">
+            <a:avLst/>
+          </a:prstGeom>
+          <a:noFill/>
+          <a:ln/>
+        </p:spPr>
+        <p:txBody>
+          <a:bodyPr wrap="square" lIns="0" tIns="0" rIns="0" bIns="0" rtlCol="0" anchor="t"/>
+          <a:lstStyle/>
+          <a:p>
+            <a:pPr algn="l" indent="0" marL="0">
+              <a:spcAft>
+                <a:spcPts val="800"/>
+              </a:spcAft>
+              <a:buNone/>
+            </a:pPr>
+            <a:r>
+              <a:rPr lang="en-US" sz="3600" i="1" dirty="0">
+                <a:solidFill>
+                  <a:srgbClr val="111111"/>
+                </a:solidFill>
+                <a:latin typeface="Times New Roman" pitchFamily="34" charset="0"/>
+                <a:ea typeface="Times New Roman" pitchFamily="34" charset="-122"/>
+                <a:cs typeface="Times New Roman" pitchFamily="34" charset="-120"/>
+              </a:rPr>
+              <a:t>Wave erosion forms the following features:</a:t>
+            </a:r>
+            <a:endParaRPr lang="en-US" sz="3600" dirty="0"/>
+          </a:p>
+          <a:p>
+            <a:pPr algn="l" indent="0" marL="0">
+              <a:spcAft>
+                <a:spcPts val="800"/>
+              </a:spcAft>
+              <a:buNone/>
+            </a:pPr>
+            <a:r>
+              <a:rPr lang="en-US" sz="3600" b="1" dirty="0">
+                <a:solidFill>
+                  <a:srgbClr val="111111"/>
+                </a:solidFill>
+                <a:latin typeface="Times New Roman" pitchFamily="34" charset="0"/>
+                <a:ea typeface="Times New Roman" pitchFamily="34" charset="-122"/>
+                <a:cs typeface="Times New Roman" pitchFamily="34" charset="-120"/>
+              </a:rPr>
+              <a:t>Capes and bays: </a:t>
+            </a:r>
+            <a:pPr algn="l" indent="0" marL="0">
+              <a:spcAft>
+                <a:spcPts val="800"/>
+              </a:spcAft>
+              <a:buNone/>
+            </a:pPr>
+            <a:r>
+              <a:rPr lang="en-US" sz="3600" dirty="0">
+                <a:solidFill>
+                  <a:srgbClr val="111111"/>
+                </a:solidFill>
+                <a:latin typeface="Times New Roman" pitchFamily="34" charset="0"/>
+                <a:ea typeface="Times New Roman" pitchFamily="34" charset="-122"/>
+                <a:cs typeface="Times New Roman" pitchFamily="34" charset="-120"/>
+              </a:rPr>
+              <a:t>Where hard and soft rocks alternate, hard rock remains as capes and soft rock is worn back into bays.</a:t>
+            </a:r>
+            <a:endParaRPr lang="en-US" sz="3600" dirty="0"/>
+          </a:p>
+        </p:txBody>
+      </p:sp>
       <p:pic>
         <p:nvPicPr>
-          <p:cNvPr id="4" name="Image 0" descr="/home/claude/f4/img/v2/headland_last.png">    </p:cNvPr>
+          <p:cNvPr id="5" name="Image 0" descr="/home/claude/f4/img/capes_bays.png">    </p:cNvPr>
           <p:cNvPicPr>
             <a:picLocks noChangeAspect="1"/>
           </p:cNvPicPr>
@@ -12721,8 +13158,8 @@
         </p:blipFill>
         <p:spPr>
           <a:xfrm>
-            <a:off x="629930" y="1783080"/>
-            <a:ext cx="10931835" cy="4270248"/>
+            <a:off x="5349240" y="1958041"/>
+            <a:ext cx="6659575" cy="3920327"/>
           </a:xfrm>
           <a:prstGeom prst="rect">
             <a:avLst/>
@@ -12731,14 +13168,14 @@
       </p:pic>
       <p:sp>
         <p:nvSpPr>
-          <p:cNvPr id="5" name="Text 2"/>
+          <p:cNvPr id="6" name="Text 3"/>
           <p:cNvSpPr/>
           <p:nvPr/>
         </p:nvSpPr>
         <p:spPr>
           <a:xfrm>
-            <a:off x="457200" y="6089904"/>
-            <a:ext cx="11277295" cy="347472"/>
+            <a:off x="5349240" y="6089904"/>
+            <a:ext cx="6659575" cy="347472"/>
           </a:xfrm>
           <a:prstGeom prst="rect">
             <a:avLst/>
@@ -12754,7 +13191,7 @@
               <a:buNone/>
             </a:pPr>
             <a:r>
-              <a:rPr lang="en-US" sz="1800" i="1" dirty="0">
+              <a:rPr lang="en-US" sz="1600" i="1" dirty="0">
                 <a:solidFill>
                   <a:srgbClr val="555555"/>
                 </a:solidFill>
@@ -12762,9 +13199,9 @@
                 <a:ea typeface="Times New Roman" pitchFamily="34" charset="-122"/>
                 <a:cs typeface="Times New Roman" pitchFamily="34" charset="-120"/>
               </a:rPr>
-              <a:t>Illustration: erosion of a headland</a:t>
-            </a:r>
-            <a:endParaRPr lang="en-US" sz="1800" dirty="0"/>
+              <a:t>Illustration: capes and bays</a:t>
+            </a:r>
+            <a:endParaRPr lang="en-US" sz="1600" dirty="0"/>
           </a:p>
         </p:txBody>
       </p:sp>
@@ -12874,15 +13311,115 @@
                 <a:ea typeface="Calibri" pitchFamily="34" charset="-122"/>
                 <a:cs typeface="Calibri" pitchFamily="34" charset="-120"/>
               </a:rPr>
-              <a:t>FORMATIVE EVALUATION</a:t>
+              <a:t>BOARD SUMMARY</a:t>
             </a:r>
             <a:endParaRPr lang="en-US" sz="1400" dirty="0"/>
+          </a:p>
+        </p:txBody>
+      </p:sp>
+      <p:sp>
+        <p:nvSpPr>
+          <p:cNvPr id="3" name="Text 1"/>
+          <p:cNvSpPr/>
+          <p:nvPr/>
+        </p:nvSpPr>
+        <p:spPr>
+          <a:xfrm>
+            <a:off x="365760" y="1005840"/>
+            <a:ext cx="11460175" cy="731520"/>
+          </a:xfrm>
+          <a:prstGeom prst="rect">
+            <a:avLst/>
+          </a:prstGeom>
+          <a:noFill/>
+          <a:ln/>
+        </p:spPr>
+        <p:txBody>
+          <a:bodyPr wrap="square" lIns="0" tIns="0" rIns="0" bIns="0" rtlCol="0" anchor="ctr">
+            <a:normAutofit/>
+          </a:bodyPr>
+          <a:lstStyle/>
+          <a:p>
+            <a:pPr algn="ctr" indent="0" marL="0">
+              <a:buNone/>
+            </a:pPr>
+            <a:r>
+              <a:rPr lang="en-US" sz="3600" b="1" dirty="0">
+                <a:solidFill>
+                  <a:srgbClr val="990011"/>
+                </a:solidFill>
+                <a:latin typeface="Times New Roman" pitchFamily="34" charset="0"/>
+                <a:ea typeface="Times New Roman" pitchFamily="34" charset="-122"/>
+                <a:cs typeface="Times New Roman" pitchFamily="34" charset="-120"/>
+              </a:rPr>
+              <a:t>2. Erosional Features</a:t>
+            </a:r>
+            <a:endParaRPr lang="en-US" sz="3600" dirty="0"/>
+          </a:p>
+        </p:txBody>
+      </p:sp>
+      <p:sp>
+        <p:nvSpPr>
+          <p:cNvPr id="4" name="Text 2"/>
+          <p:cNvSpPr/>
+          <p:nvPr/>
+        </p:nvSpPr>
+        <p:spPr>
+          <a:xfrm>
+            <a:off x="365760" y="1783080"/>
+            <a:ext cx="4846320" cy="4617720"/>
+          </a:xfrm>
+          <a:prstGeom prst="rect">
+            <a:avLst/>
+          </a:prstGeom>
+          <a:noFill/>
+          <a:ln/>
+        </p:spPr>
+        <p:txBody>
+          <a:bodyPr wrap="square" lIns="0" tIns="0" rIns="0" bIns="0" rtlCol="0" anchor="t"/>
+          <a:lstStyle/>
+          <a:p>
+            <a:pPr algn="l" indent="0" marL="0">
+              <a:spcAft>
+                <a:spcPts val="800"/>
+              </a:spcAft>
+              <a:buNone/>
+            </a:pPr>
+            <a:r>
+              <a:rPr lang="en-US" sz="3600" b="1" dirty="0">
+                <a:solidFill>
+                  <a:srgbClr val="111111"/>
+                </a:solidFill>
+                <a:latin typeface="Times New Roman" pitchFamily="34" charset="0"/>
+                <a:ea typeface="Times New Roman" pitchFamily="34" charset="-122"/>
+                <a:cs typeface="Times New Roman" pitchFamily="34" charset="-120"/>
+              </a:rPr>
+              <a:t>Cliff and wave-cut platform: </a:t>
+            </a:r>
+            <a:pPr algn="l" indent="0" marL="0">
+              <a:spcAft>
+                <a:spcPts val="800"/>
+              </a:spcAft>
+              <a:buNone/>
+            </a:pPr>
+            <a:r>
+              <a:rPr lang="en-US" sz="3600" dirty="0">
+                <a:solidFill>
+                  <a:srgbClr val="111111"/>
+                </a:solidFill>
+                <a:latin typeface="Times New Roman" pitchFamily="34" charset="0"/>
+                <a:ea typeface="Times New Roman" pitchFamily="34" charset="-122"/>
+                <a:cs typeface="Times New Roman" pitchFamily="34" charset="-120"/>
+              </a:rPr>
+              <a:t>Waves cut a notch at the foot of the rock, the top collapses, and the cliff retreats, leaving a flat rock platform.</a:t>
+            </a:r>
+            <a:endParaRPr lang="en-US" sz="3600" dirty="0"/>
           </a:p>
         </p:txBody>
       </p:sp>
       <p:pic>
         <p:nvPicPr>
-          <p:cNvPr id="3" name="Image 0" descr="/home/claude/f4/img/minesec_sheet.png">    </p:cNvPr>
+          <p:cNvPr id="5" name="Image 0" descr="/home/claude/f4/img/cliff_platform.png">    </p:cNvPr>
           <p:cNvPicPr>
             <a:picLocks noChangeAspect="1"/>
           </p:cNvPicPr>
@@ -12896,8 +13433,8 @@
         </p:blipFill>
         <p:spPr>
           <a:xfrm>
-            <a:off x="0" y="658368"/>
-            <a:ext cx="5120640" cy="5833872"/>
+            <a:off x="5349240" y="2018517"/>
+            <a:ext cx="6659575" cy="3799373"/>
           </a:xfrm>
           <a:prstGeom prst="rect">
             <a:avLst/>
@@ -12906,14 +13443,14 @@
       </p:pic>
       <p:sp>
         <p:nvSpPr>
-          <p:cNvPr id="4" name="Text 1"/>
+          <p:cNvPr id="6" name="Text 3"/>
           <p:cNvSpPr/>
           <p:nvPr/>
         </p:nvSpPr>
         <p:spPr>
           <a:xfrm>
-            <a:off x="5349240" y="1005840"/>
-            <a:ext cx="6522415" cy="731520"/>
+            <a:off x="5349240" y="6089904"/>
+            <a:ext cx="6659575" cy="347472"/>
           </a:xfrm>
           <a:prstGeom prst="rect">
             <a:avLst/>
@@ -12922,68 +13459,24 @@
           <a:ln/>
         </p:spPr>
         <p:txBody>
-          <a:bodyPr wrap="square" lIns="0" tIns="0" rIns="0" bIns="0" rtlCol="0" anchor="ctr">
-            <a:normAutofit/>
-          </a:bodyPr>
+          <a:bodyPr wrap="square" lIns="0" tIns="0" rIns="0" bIns="0" rtlCol="0" anchor="ctr"/>
           <a:lstStyle/>
           <a:p>
             <a:pPr algn="ctr" indent="0" marL="0">
               <a:buNone/>
             </a:pPr>
             <a:r>
-              <a:rPr lang="en-US" sz="3600" b="1" dirty="0">
-                <a:solidFill>
-                  <a:srgbClr val="990011"/>
+              <a:rPr lang="en-US" sz="1600" i="1" dirty="0">
+                <a:solidFill>
+                  <a:srgbClr val="555555"/>
                 </a:solidFill>
                 <a:latin typeface="Times New Roman" pitchFamily="34" charset="0"/>
                 <a:ea typeface="Times New Roman" pitchFamily="34" charset="-122"/>
                 <a:cs typeface="Times New Roman" pitchFamily="34" charset="-120"/>
               </a:rPr>
-              <a:t>Evaluation 1</a:t>
-            </a:r>
-            <a:endParaRPr lang="en-US" sz="3600" dirty="0"/>
-          </a:p>
-        </p:txBody>
-      </p:sp>
-      <p:sp>
-        <p:nvSpPr>
-          <p:cNvPr id="5" name="Text 2"/>
-          <p:cNvSpPr/>
-          <p:nvPr/>
-        </p:nvSpPr>
-        <p:spPr>
-          <a:xfrm>
-            <a:off x="5349240" y="1783080"/>
-            <a:ext cx="6522415" cy="4663440"/>
-          </a:xfrm>
-          <a:prstGeom prst="rect">
-            <a:avLst/>
-          </a:prstGeom>
-          <a:noFill/>
-          <a:ln/>
-        </p:spPr>
-        <p:txBody>
-          <a:bodyPr wrap="square" lIns="0" tIns="0" rIns="0" bIns="0" rtlCol="0" anchor="t"/>
-          <a:lstStyle/>
-          <a:p>
-            <a:pPr algn="l" indent="0" marL="0">
-              <a:spcAft>
-                <a:spcPts val="800"/>
-              </a:spcAft>
-              <a:buNone/>
-            </a:pPr>
-            <a:r>
-              <a:rPr lang="en-US" sz="4000" dirty="0">
-                <a:solidFill>
-                  <a:srgbClr val="111111"/>
-                </a:solidFill>
-                <a:latin typeface="Times New Roman" pitchFamily="34" charset="0"/>
-                <a:ea typeface="Times New Roman" pitchFamily="34" charset="-122"/>
-                <a:cs typeface="Times New Roman" pitchFamily="34" charset="-120"/>
-              </a:rPr>
-              <a:t>Put in order: arch, stump, cave, stack.</a:t>
-            </a:r>
-            <a:endParaRPr lang="en-US" sz="4000" dirty="0"/>
+              <a:t>Illustration: cliff and wave-cut platform</a:t>
+            </a:r>
+            <a:endParaRPr lang="en-US" sz="1600" dirty="0"/>
           </a:p>
         </p:txBody>
       </p:sp>
@@ -13093,15 +13586,115 @@
                 <a:ea typeface="Calibri" pitchFamily="34" charset="-122"/>
                 <a:cs typeface="Calibri" pitchFamily="34" charset="-120"/>
               </a:rPr>
-              <a:t>FORMATIVE EVALUATION</a:t>
+              <a:t>BOARD SUMMARY</a:t>
             </a:r>
             <a:endParaRPr lang="en-US" sz="1400" dirty="0"/>
+          </a:p>
+        </p:txBody>
+      </p:sp>
+      <p:sp>
+        <p:nvSpPr>
+          <p:cNvPr id="3" name="Text 1"/>
+          <p:cNvSpPr/>
+          <p:nvPr/>
+        </p:nvSpPr>
+        <p:spPr>
+          <a:xfrm>
+            <a:off x="365760" y="1005840"/>
+            <a:ext cx="11460175" cy="731520"/>
+          </a:xfrm>
+          <a:prstGeom prst="rect">
+            <a:avLst/>
+          </a:prstGeom>
+          <a:noFill/>
+          <a:ln/>
+        </p:spPr>
+        <p:txBody>
+          <a:bodyPr wrap="square" lIns="0" tIns="0" rIns="0" bIns="0" rtlCol="0" anchor="ctr">
+            <a:normAutofit/>
+          </a:bodyPr>
+          <a:lstStyle/>
+          <a:p>
+            <a:pPr algn="ctr" indent="0" marL="0">
+              <a:buNone/>
+            </a:pPr>
+            <a:r>
+              <a:rPr lang="en-US" sz="3600" b="1" dirty="0">
+                <a:solidFill>
+                  <a:srgbClr val="990011"/>
+                </a:solidFill>
+                <a:latin typeface="Times New Roman" pitchFamily="34" charset="0"/>
+                <a:ea typeface="Times New Roman" pitchFamily="34" charset="-122"/>
+                <a:cs typeface="Times New Roman" pitchFamily="34" charset="-120"/>
+              </a:rPr>
+              <a:t>2. Erosional Features</a:t>
+            </a:r>
+            <a:endParaRPr lang="en-US" sz="3600" dirty="0"/>
+          </a:p>
+        </p:txBody>
+      </p:sp>
+      <p:sp>
+        <p:nvSpPr>
+          <p:cNvPr id="4" name="Text 2"/>
+          <p:cNvSpPr/>
+          <p:nvPr/>
+        </p:nvSpPr>
+        <p:spPr>
+          <a:xfrm>
+            <a:off x="365760" y="1783080"/>
+            <a:ext cx="4846320" cy="4617720"/>
+          </a:xfrm>
+          <a:prstGeom prst="rect">
+            <a:avLst/>
+          </a:prstGeom>
+          <a:noFill/>
+          <a:ln/>
+        </p:spPr>
+        <p:txBody>
+          <a:bodyPr wrap="square" lIns="0" tIns="0" rIns="0" bIns="0" rtlCol="0" anchor="t"/>
+          <a:lstStyle/>
+          <a:p>
+            <a:pPr algn="l" indent="0" marL="0">
+              <a:spcAft>
+                <a:spcPts val="800"/>
+              </a:spcAft>
+              <a:buNone/>
+            </a:pPr>
+            <a:r>
+              <a:rPr lang="en-US" sz="3600" b="1" dirty="0">
+                <a:solidFill>
+                  <a:srgbClr val="111111"/>
+                </a:solidFill>
+                <a:latin typeface="Times New Roman" pitchFamily="34" charset="0"/>
+                <a:ea typeface="Times New Roman" pitchFamily="34" charset="-122"/>
+                <a:cs typeface="Times New Roman" pitchFamily="34" charset="-120"/>
+              </a:rPr>
+              <a:t>Cave: </a:t>
+            </a:r>
+            <a:pPr algn="l" indent="0" marL="0">
+              <a:spcAft>
+                <a:spcPts val="800"/>
+              </a:spcAft>
+              <a:buNone/>
+            </a:pPr>
+            <a:r>
+              <a:rPr lang="en-US" sz="3600" dirty="0">
+                <a:solidFill>
+                  <a:srgbClr val="111111"/>
+                </a:solidFill>
+                <a:latin typeface="Times New Roman" pitchFamily="34" charset="0"/>
+                <a:ea typeface="Times New Roman" pitchFamily="34" charset="-122"/>
+                <a:cs typeface="Times New Roman" pitchFamily="34" charset="-120"/>
+              </a:rPr>
+              <a:t>Waves enlarge a crack at the foot of a headland into a hollow.</a:t>
+            </a:r>
+            <a:endParaRPr lang="en-US" sz="3600" dirty="0"/>
           </a:p>
         </p:txBody>
       </p:sp>
       <p:pic>
         <p:nvPicPr>
-          <p:cNvPr id="3" name="Image 0" descr="/home/claude/f4/img/minesec_sheet.png">    </p:cNvPr>
+          <p:cNvPr id="5" name="Image 0" descr="/home/claude/f4/img/v2/headland_last.png">    </p:cNvPr>
           <p:cNvPicPr>
             <a:picLocks noChangeAspect="1"/>
           </p:cNvPicPr>
@@ -13115,8 +13708,8 @@
         </p:blipFill>
         <p:spPr>
           <a:xfrm>
-            <a:off x="0" y="658368"/>
-            <a:ext cx="5120640" cy="5833872"/>
+            <a:off x="5349240" y="2617506"/>
+            <a:ext cx="6659575" cy="2601397"/>
           </a:xfrm>
           <a:prstGeom prst="rect">
             <a:avLst/>
@@ -13125,14 +13718,14 @@
       </p:pic>
       <p:sp>
         <p:nvSpPr>
-          <p:cNvPr id="4" name="Text 1"/>
+          <p:cNvPr id="6" name="Text 3"/>
           <p:cNvSpPr/>
           <p:nvPr/>
         </p:nvSpPr>
         <p:spPr>
           <a:xfrm>
-            <a:off x="5349240" y="1005840"/>
-            <a:ext cx="6522415" cy="731520"/>
+            <a:off x="5349240" y="6089904"/>
+            <a:ext cx="6659575" cy="347472"/>
           </a:xfrm>
           <a:prstGeom prst="rect">
             <a:avLst/>
@@ -13141,68 +13734,24 @@
           <a:ln/>
         </p:spPr>
         <p:txBody>
-          <a:bodyPr wrap="square" lIns="0" tIns="0" rIns="0" bIns="0" rtlCol="0" anchor="ctr">
-            <a:normAutofit/>
-          </a:bodyPr>
+          <a:bodyPr wrap="square" lIns="0" tIns="0" rIns="0" bIns="0" rtlCol="0" anchor="ctr"/>
           <a:lstStyle/>
           <a:p>
             <a:pPr algn="ctr" indent="0" marL="0">
               <a:buNone/>
             </a:pPr>
             <a:r>
-              <a:rPr lang="en-US" sz="3600" b="1" dirty="0">
-                <a:solidFill>
-                  <a:srgbClr val="990011"/>
+              <a:rPr lang="en-US" sz="1600" i="1" dirty="0">
+                <a:solidFill>
+                  <a:srgbClr val="555555"/>
                 </a:solidFill>
                 <a:latin typeface="Times New Roman" pitchFamily="34" charset="0"/>
                 <a:ea typeface="Times New Roman" pitchFamily="34" charset="-122"/>
                 <a:cs typeface="Times New Roman" pitchFamily="34" charset="-120"/>
               </a:rPr>
-              <a:t>Expected Answer</a:t>
-            </a:r>
-            <a:endParaRPr lang="en-US" sz="3600" dirty="0"/>
-          </a:p>
-        </p:txBody>
-      </p:sp>
-      <p:sp>
-        <p:nvSpPr>
-          <p:cNvPr id="5" name="Text 2"/>
-          <p:cNvSpPr/>
-          <p:nvPr/>
-        </p:nvSpPr>
-        <p:spPr>
-          <a:xfrm>
-            <a:off x="5349240" y="1783080"/>
-            <a:ext cx="6522415" cy="4663440"/>
-          </a:xfrm>
-          <a:prstGeom prst="rect">
-            <a:avLst/>
-          </a:prstGeom>
-          <a:noFill/>
-          <a:ln/>
-        </p:spPr>
-        <p:txBody>
-          <a:bodyPr wrap="square" lIns="0" tIns="0" rIns="0" bIns="0" rtlCol="0" anchor="t"/>
-          <a:lstStyle/>
-          <a:p>
-            <a:pPr algn="l" indent="0" marL="0">
-              <a:spcAft>
-                <a:spcPts val="800"/>
-              </a:spcAft>
-              <a:buNone/>
-            </a:pPr>
-            <a:r>
-              <a:rPr lang="en-US" sz="4000" dirty="0">
-                <a:solidFill>
-                  <a:srgbClr val="111111"/>
-                </a:solidFill>
-                <a:latin typeface="Times New Roman" pitchFamily="34" charset="0"/>
-                <a:ea typeface="Times New Roman" pitchFamily="34" charset="-122"/>
-                <a:cs typeface="Times New Roman" pitchFamily="34" charset="-120"/>
-              </a:rPr>
-              <a:t>Cave, arch, stack, stump.</a:t>
-            </a:r>
-            <a:endParaRPr lang="en-US" sz="4000" dirty="0"/>
+              <a:t>Illustration: cave, arch, stack and stump</a:t>
+            </a:r>
+            <a:endParaRPr lang="en-US" sz="1600" dirty="0"/>
           </a:p>
         </p:txBody>
       </p:sp>
@@ -13312,15 +13861,115 @@
                 <a:ea typeface="Calibri" pitchFamily="34" charset="-122"/>
                 <a:cs typeface="Calibri" pitchFamily="34" charset="-120"/>
               </a:rPr>
-              <a:t>FORMATIVE EVALUATION</a:t>
+              <a:t>BOARD SUMMARY</a:t>
             </a:r>
             <a:endParaRPr lang="en-US" sz="1400" dirty="0"/>
+          </a:p>
+        </p:txBody>
+      </p:sp>
+      <p:sp>
+        <p:nvSpPr>
+          <p:cNvPr id="3" name="Text 1"/>
+          <p:cNvSpPr/>
+          <p:nvPr/>
+        </p:nvSpPr>
+        <p:spPr>
+          <a:xfrm>
+            <a:off x="365760" y="1005840"/>
+            <a:ext cx="11460175" cy="731520"/>
+          </a:xfrm>
+          <a:prstGeom prst="rect">
+            <a:avLst/>
+          </a:prstGeom>
+          <a:noFill/>
+          <a:ln/>
+        </p:spPr>
+        <p:txBody>
+          <a:bodyPr wrap="square" lIns="0" tIns="0" rIns="0" bIns="0" rtlCol="0" anchor="ctr">
+            <a:normAutofit/>
+          </a:bodyPr>
+          <a:lstStyle/>
+          <a:p>
+            <a:pPr algn="ctr" indent="0" marL="0">
+              <a:buNone/>
+            </a:pPr>
+            <a:r>
+              <a:rPr lang="en-US" sz="3600" b="1" dirty="0">
+                <a:solidFill>
+                  <a:srgbClr val="990011"/>
+                </a:solidFill>
+                <a:latin typeface="Times New Roman" pitchFamily="34" charset="0"/>
+                <a:ea typeface="Times New Roman" pitchFamily="34" charset="-122"/>
+                <a:cs typeface="Times New Roman" pitchFamily="34" charset="-120"/>
+              </a:rPr>
+              <a:t>2. Erosional Features</a:t>
+            </a:r>
+            <a:endParaRPr lang="en-US" sz="3600" dirty="0"/>
+          </a:p>
+        </p:txBody>
+      </p:sp>
+      <p:sp>
+        <p:nvSpPr>
+          <p:cNvPr id="4" name="Text 2"/>
+          <p:cNvSpPr/>
+          <p:nvPr/>
+        </p:nvSpPr>
+        <p:spPr>
+          <a:xfrm>
+            <a:off x="365760" y="1783080"/>
+            <a:ext cx="4846320" cy="4617720"/>
+          </a:xfrm>
+          <a:prstGeom prst="rect">
+            <a:avLst/>
+          </a:prstGeom>
+          <a:noFill/>
+          <a:ln/>
+        </p:spPr>
+        <p:txBody>
+          <a:bodyPr wrap="square" lIns="0" tIns="0" rIns="0" bIns="0" rtlCol="0" anchor="t"/>
+          <a:lstStyle/>
+          <a:p>
+            <a:pPr algn="l" indent="0" marL="0">
+              <a:spcAft>
+                <a:spcPts val="800"/>
+              </a:spcAft>
+              <a:buNone/>
+            </a:pPr>
+            <a:r>
+              <a:rPr lang="en-US" sz="3600" b="1" dirty="0">
+                <a:solidFill>
+                  <a:srgbClr val="111111"/>
+                </a:solidFill>
+                <a:latin typeface="Times New Roman" pitchFamily="34" charset="0"/>
+                <a:ea typeface="Times New Roman" pitchFamily="34" charset="-122"/>
+                <a:cs typeface="Times New Roman" pitchFamily="34" charset="-120"/>
+              </a:rPr>
+              <a:t>Arch: </a:t>
+            </a:r>
+            <a:pPr algn="l" indent="0" marL="0">
+              <a:spcAft>
+                <a:spcPts val="800"/>
+              </a:spcAft>
+              <a:buNone/>
+            </a:pPr>
+            <a:r>
+              <a:rPr lang="en-US" sz="3600" dirty="0">
+                <a:solidFill>
+                  <a:srgbClr val="111111"/>
+                </a:solidFill>
+                <a:latin typeface="Times New Roman" pitchFamily="34" charset="0"/>
+                <a:ea typeface="Times New Roman" pitchFamily="34" charset="-122"/>
+                <a:cs typeface="Times New Roman" pitchFamily="34" charset="-120"/>
+              </a:rPr>
+              <a:t>Two caves on each side of a headland meet and form a hole through it.</a:t>
+            </a:r>
+            <a:endParaRPr lang="en-US" sz="3600" dirty="0"/>
           </a:p>
         </p:txBody>
       </p:sp>
       <p:pic>
         <p:nvPicPr>
-          <p:cNvPr id="3" name="Image 0" descr="/home/claude/f4/img/minesec_sheet.png">    </p:cNvPr>
+          <p:cNvPr id="5" name="Image 0" descr="/home/claude/f4/img/v2/f4_arch.jpg">    </p:cNvPr>
           <p:cNvPicPr>
             <a:picLocks noChangeAspect="1"/>
           </p:cNvPicPr>
@@ -13334,8 +13983,8 @@
         </p:blipFill>
         <p:spPr>
           <a:xfrm>
-            <a:off x="0" y="658368"/>
-            <a:ext cx="5120640" cy="5833872"/>
+            <a:off x="5349240" y="2071212"/>
+            <a:ext cx="6659575" cy="3693983"/>
           </a:xfrm>
           <a:prstGeom prst="rect">
             <a:avLst/>
@@ -13344,14 +13993,14 @@
       </p:pic>
       <p:sp>
         <p:nvSpPr>
-          <p:cNvPr id="4" name="Text 1"/>
+          <p:cNvPr id="6" name="Text 3"/>
           <p:cNvSpPr/>
           <p:nvPr/>
         </p:nvSpPr>
         <p:spPr>
           <a:xfrm>
-            <a:off x="5349240" y="1005840"/>
-            <a:ext cx="6522415" cy="731520"/>
+            <a:off x="5349240" y="6089904"/>
+            <a:ext cx="6659575" cy="347472"/>
           </a:xfrm>
           <a:prstGeom prst="rect">
             <a:avLst/>
@@ -13360,68 +14009,24 @@
           <a:ln/>
         </p:spPr>
         <p:txBody>
-          <a:bodyPr wrap="square" lIns="0" tIns="0" rIns="0" bIns="0" rtlCol="0" anchor="ctr">
-            <a:normAutofit/>
-          </a:bodyPr>
+          <a:bodyPr wrap="square" lIns="0" tIns="0" rIns="0" bIns="0" rtlCol="0" anchor="ctr"/>
           <a:lstStyle/>
           <a:p>
             <a:pPr algn="ctr" indent="0" marL="0">
               <a:buNone/>
             </a:pPr>
             <a:r>
-              <a:rPr lang="en-US" sz="3600" b="1" dirty="0">
-                <a:solidFill>
-                  <a:srgbClr val="990011"/>
+              <a:rPr lang="en-US" sz="1600" i="1" dirty="0">
+                <a:solidFill>
+                  <a:srgbClr val="555555"/>
                 </a:solidFill>
                 <a:latin typeface="Times New Roman" pitchFamily="34" charset="0"/>
                 <a:ea typeface="Times New Roman" pitchFamily="34" charset="-122"/>
                 <a:cs typeface="Times New Roman" pitchFamily="34" charset="-120"/>
               </a:rPr>
-              <a:t>Evaluation 2</a:t>
-            </a:r>
-            <a:endParaRPr lang="en-US" sz="3600" dirty="0"/>
-          </a:p>
-        </p:txBody>
-      </p:sp>
-      <p:sp>
-        <p:nvSpPr>
-          <p:cNvPr id="5" name="Text 2"/>
-          <p:cNvSpPr/>
-          <p:nvPr/>
-        </p:nvSpPr>
-        <p:spPr>
-          <a:xfrm>
-            <a:off x="5349240" y="1783080"/>
-            <a:ext cx="6522415" cy="4663440"/>
-          </a:xfrm>
-          <a:prstGeom prst="rect">
-            <a:avLst/>
-          </a:prstGeom>
-          <a:noFill/>
-          <a:ln/>
-        </p:spPr>
-        <p:txBody>
-          <a:bodyPr wrap="square" lIns="0" tIns="0" rIns="0" bIns="0" rtlCol="0" anchor="t"/>
-          <a:lstStyle/>
-          <a:p>
-            <a:pPr algn="l" indent="0" marL="0">
-              <a:spcAft>
-                <a:spcPts val="800"/>
-              </a:spcAft>
-              <a:buNone/>
-            </a:pPr>
-            <a:r>
-              <a:rPr lang="en-US" sz="4000" dirty="0">
-                <a:solidFill>
-                  <a:srgbClr val="111111"/>
-                </a:solidFill>
-                <a:latin typeface="Times New Roman" pitchFamily="34" charset="0"/>
-                <a:ea typeface="Times New Roman" pitchFamily="34" charset="-122"/>
-                <a:cs typeface="Times New Roman" pitchFamily="34" charset="-120"/>
-              </a:rPr>
-              <a:t>What is hydraulic action?</a:t>
-            </a:r>
-            <a:endParaRPr lang="en-US" sz="4000" dirty="0"/>
+              <a:t>Illustration: an arch</a:t>
+            </a:r>
+            <a:endParaRPr lang="en-US" sz="1600" dirty="0"/>
           </a:p>
         </p:txBody>
       </p:sp>
@@ -13531,7 +14136,7 @@
                 <a:ea typeface="Calibri" pitchFamily="34" charset="-122"/>
                 <a:cs typeface="Calibri" pitchFamily="34" charset="-120"/>
               </a:rPr>
-              <a:t>FORMATIVE EVALUATION</a:t>
+              <a:t>BOARD SUMMARY</a:t>
             </a:r>
             <a:endParaRPr lang="en-US" sz="1400" dirty="0"/>
           </a:p>
@@ -13554,7 +14159,7 @@
         <p:spPr>
           <a:xfrm>
             <a:off x="0" y="658368"/>
-            <a:ext cx="5120640" cy="5833872"/>
+            <a:ext cx="1463040" cy="5833872"/>
           </a:xfrm>
           <a:prstGeom prst="rect">
             <a:avLst/>
@@ -13569,8 +14174,8 @@
         </p:nvSpPr>
         <p:spPr>
           <a:xfrm>
-            <a:off x="5349240" y="1005840"/>
-            <a:ext cx="6522415" cy="731520"/>
+            <a:off x="1691640" y="1005840"/>
+            <a:ext cx="10180015" cy="731520"/>
           </a:xfrm>
           <a:prstGeom prst="rect">
             <a:avLst/>
@@ -13596,7 +14201,7 @@
                 <a:ea typeface="Times New Roman" pitchFamily="34" charset="-122"/>
                 <a:cs typeface="Times New Roman" pitchFamily="34" charset="-120"/>
               </a:rPr>
-              <a:t>Expected Answer</a:t>
+              <a:t>2. Erosional Features</a:t>
             </a:r>
             <a:endParaRPr lang="en-US" sz="3600" dirty="0"/>
           </a:p>
@@ -13610,8 +14215,8 @@
         </p:nvSpPr>
         <p:spPr>
           <a:xfrm>
-            <a:off x="5349240" y="1783080"/>
-            <a:ext cx="6522415" cy="4663440"/>
+            <a:off x="1691640" y="1783080"/>
+            <a:ext cx="10180015" cy="4663440"/>
           </a:xfrm>
           <a:prstGeom prst="rect">
             <a:avLst/>
@@ -13630,7 +14235,7 @@
               <a:buNone/>
             </a:pPr>
             <a:r>
-              <a:rPr lang="en-US" sz="4000" dirty="0">
+              <a:rPr lang="en-US" sz="4000" b="1" dirty="0">
                 <a:solidFill>
                   <a:srgbClr val="111111"/>
                 </a:solidFill>
@@ -13638,7 +14243,98 @@
                 <a:ea typeface="Times New Roman" pitchFamily="34" charset="-122"/>
                 <a:cs typeface="Times New Roman" pitchFamily="34" charset="-120"/>
               </a:rPr>
-              <a:t>The force of the waves breaking the rock.</a:t>
+              <a:t>Stack: </a:t>
+            </a:r>
+            <a:pPr algn="l" indent="0" marL="0">
+              <a:spcAft>
+                <a:spcPts val="800"/>
+              </a:spcAft>
+              <a:buNone/>
+            </a:pPr>
+            <a:r>
+              <a:rPr lang="en-US" sz="4000" dirty="0">
+                <a:solidFill>
+                  <a:srgbClr val="111111"/>
+                </a:solidFill>
+                <a:latin typeface="Times New Roman" pitchFamily="34" charset="0"/>
+                <a:ea typeface="Times New Roman" pitchFamily="34" charset="-122"/>
+                <a:cs typeface="Times New Roman" pitchFamily="34" charset="-120"/>
+              </a:rPr>
+              <a:t>The roof of the arch collapses and leaves a pillar of rock standing in the sea.</a:t>
+            </a:r>
+            <a:endParaRPr lang="en-US" sz="4000" dirty="0"/>
+          </a:p>
+          <a:p>
+            <a:pPr algn="l" indent="0" marL="0">
+              <a:spcAft>
+                <a:spcPts val="800"/>
+              </a:spcAft>
+              <a:buNone/>
+            </a:pPr>
+            <a:r>
+              <a:rPr lang="en-US" sz="4000" b="1" dirty="0">
+                <a:solidFill>
+                  <a:srgbClr val="111111"/>
+                </a:solidFill>
+                <a:latin typeface="Times New Roman" pitchFamily="34" charset="0"/>
+                <a:ea typeface="Times New Roman" pitchFamily="34" charset="-122"/>
+                <a:cs typeface="Times New Roman" pitchFamily="34" charset="-120"/>
+              </a:rPr>
+              <a:t>Stump: </a:t>
+            </a:r>
+            <a:pPr algn="l" indent="0" marL="0">
+              <a:spcAft>
+                <a:spcPts val="800"/>
+              </a:spcAft>
+              <a:buNone/>
+            </a:pPr>
+            <a:r>
+              <a:rPr lang="en-US" sz="4000" dirty="0">
+                <a:solidFill>
+                  <a:srgbClr val="111111"/>
+                </a:solidFill>
+                <a:latin typeface="Times New Roman" pitchFamily="34" charset="0"/>
+                <a:ea typeface="Times New Roman" pitchFamily="34" charset="-122"/>
+                <a:cs typeface="Times New Roman" pitchFamily="34" charset="-120"/>
+              </a:rPr>
+              <a:t>The stack is worn down into a low rock covered at high tide.</a:t>
+            </a:r>
+            <a:endParaRPr lang="en-US" sz="4000" dirty="0"/>
+          </a:p>
+          <a:p>
+            <a:pPr algn="l" indent="0" marL="0">
+              <a:spcAft>
+                <a:spcPts val="800"/>
+              </a:spcAft>
+              <a:buNone/>
+            </a:pPr>
+            <a:r>
+              <a:rPr lang="en-US" sz="4000" b="1" dirty="0">
+                <a:solidFill>
+                  <a:srgbClr val="111111"/>
+                </a:solidFill>
+                <a:latin typeface="Times New Roman" pitchFamily="34" charset="0"/>
+                <a:ea typeface="Times New Roman" pitchFamily="34" charset="-122"/>
+                <a:cs typeface="Times New Roman" pitchFamily="34" charset="-120"/>
+              </a:rPr>
+              <a:t>Local examples: </a:t>
+            </a:r>
+            <a:pPr algn="l" indent="0" marL="0">
+              <a:spcAft>
+                <a:spcPts val="800"/>
+              </a:spcAft>
+              <a:buNone/>
+            </a:pPr>
+            <a:r>
+              <a:rPr lang="en-US" sz="4000" dirty="0">
+                <a:solidFill>
+                  <a:srgbClr val="111111"/>
+                </a:solidFill>
+                <a:latin typeface="Times New Roman" pitchFamily="34" charset="0"/>
+                <a:ea typeface="Times New Roman" pitchFamily="34" charset="-122"/>
+                <a:cs typeface="Times New Roman" pitchFamily="34" charset="-120"/>
+              </a:rPr>
+              <a:t>Rocky cliffs, caves and small bays are found along the volcanic coast of Limbe and around Kribi.</a:t>
             </a:r>
             <a:endParaRPr lang="en-US" sz="4000" dirty="0"/>
           </a:p>
@@ -13750,7 +14446,7 @@
                 <a:ea typeface="Calibri" pitchFamily="34" charset="-122"/>
                 <a:cs typeface="Calibri" pitchFamily="34" charset="-120"/>
               </a:rPr>
-              <a:t>REMEDIATION</a:t>
+              <a:t>FORMATIVE EVALUATION</a:t>
             </a:r>
             <a:endParaRPr lang="en-US" sz="1400" dirty="0"/>
           </a:p>
@@ -13773,7 +14469,7 @@
         <p:spPr>
           <a:xfrm>
             <a:off x="0" y="658368"/>
-            <a:ext cx="1463040" cy="5833872"/>
+            <a:ext cx="5120640" cy="5833872"/>
           </a:xfrm>
           <a:prstGeom prst="rect">
             <a:avLst/>
@@ -13788,8 +14484,8 @@
         </p:nvSpPr>
         <p:spPr>
           <a:xfrm>
-            <a:off x="1691640" y="1005840"/>
-            <a:ext cx="10180015" cy="731520"/>
+            <a:off x="5349240" y="1005840"/>
+            <a:ext cx="6522415" cy="731520"/>
           </a:xfrm>
           <a:prstGeom prst="rect">
             <a:avLst/>
@@ -13815,7 +14511,7 @@
                 <a:ea typeface="Times New Roman" pitchFamily="34" charset="-122"/>
                 <a:cs typeface="Times New Roman" pitchFamily="34" charset="-120"/>
               </a:rPr>
-              <a:t>Remediation</a:t>
+              <a:t>Evaluation 1</a:t>
             </a:r>
             <a:endParaRPr lang="en-US" sz="3600" dirty="0"/>
           </a:p>
@@ -13829,8 +14525,8 @@
         </p:nvSpPr>
         <p:spPr>
           <a:xfrm>
-            <a:off x="1691640" y="1783080"/>
-            <a:ext cx="10180015" cy="4663440"/>
+            <a:off x="5349240" y="1783080"/>
+            <a:ext cx="6522415" cy="4663440"/>
           </a:xfrm>
           <a:prstGeom prst="rect">
             <a:avLst/>
@@ -13849,7 +14545,7 @@
               <a:buNone/>
             </a:pPr>
             <a:r>
-              <a:rPr lang="en-US" sz="4000" b="1" dirty="0">
+              <a:rPr lang="en-US" sz="4000" dirty="0">
                 <a:solidFill>
                   <a:srgbClr val="111111"/>
                 </a:solidFill>
@@ -13857,73 +14553,7 @@
                 <a:ea typeface="Times New Roman" pitchFamily="34" charset="-122"/>
                 <a:cs typeface="Times New Roman" pitchFamily="34" charset="-120"/>
               </a:rPr>
-              <a:t>Fill in the blanks:</a:t>
-            </a:r>
-            <a:endParaRPr lang="en-US" sz="4000" dirty="0"/>
-          </a:p>
-          <a:p>
-            <a:pPr algn="l" marL="342900" indent="-342900">
-              <a:spcAft>
-                <a:spcPts val="800"/>
-              </a:spcAft>
-              <a:buSzPct val="100000"/>
-              <a:buFont typeface="+mj-lt"/>
-              <a:buAutoNum type="arabicPeriod" startAt="1"/>
-            </a:pPr>
-            <a:r>
-              <a:rPr lang="en-US" sz="4000" dirty="0">
-                <a:solidFill>
-                  <a:srgbClr val="111111"/>
-                </a:solidFill>
-                <a:latin typeface="Times New Roman" pitchFamily="34" charset="0"/>
-                <a:ea typeface="Times New Roman" pitchFamily="34" charset="-122"/>
-                <a:cs typeface="Times New Roman" pitchFamily="34" charset="-120"/>
-              </a:rPr>
-              <a:t>A steep rock face on the coast is a ______.</a:t>
-            </a:r>
-            <a:endParaRPr lang="en-US" sz="4000" dirty="0"/>
-          </a:p>
-          <a:p>
-            <a:pPr algn="l" marL="342900" indent="-342900">
-              <a:spcAft>
-                <a:spcPts val="800"/>
-              </a:spcAft>
-              <a:buSzPct val="100000"/>
-              <a:buFont typeface="+mj-lt"/>
-              <a:buAutoNum type="arabicPeriod" startAt="1"/>
-            </a:pPr>
-            <a:r>
-              <a:rPr lang="en-US" sz="4000" dirty="0">
-                <a:solidFill>
-                  <a:srgbClr val="111111"/>
-                </a:solidFill>
-                <a:latin typeface="Times New Roman" pitchFamily="34" charset="0"/>
-                <a:ea typeface="Times New Roman" pitchFamily="34" charset="-122"/>
-                <a:cs typeface="Times New Roman" pitchFamily="34" charset="-120"/>
-              </a:rPr>
-              <a:t>A cave that goes through a headland becomes an ______.</a:t>
-            </a:r>
-            <a:endParaRPr lang="en-US" sz="4000" dirty="0"/>
-          </a:p>
-          <a:p>
-            <a:pPr algn="l" marL="342900" indent="-342900">
-              <a:spcAft>
-                <a:spcPts val="800"/>
-              </a:spcAft>
-              <a:buSzPct val="100000"/>
-              <a:buFont typeface="+mj-lt"/>
-              <a:buAutoNum type="arabicPeriod" startAt="1"/>
-            </a:pPr>
-            <a:r>
-              <a:rPr lang="en-US" sz="4000" dirty="0">
-                <a:solidFill>
-                  <a:srgbClr val="111111"/>
-                </a:solidFill>
-                <a:latin typeface="Times New Roman" pitchFamily="34" charset="0"/>
-                <a:ea typeface="Times New Roman" pitchFamily="34" charset="-122"/>
-                <a:cs typeface="Times New Roman" pitchFamily="34" charset="-120"/>
-              </a:rPr>
-              <a:t>A pillar of rock in the sea is a ______.</a:t>
+              <a:t>Put in order: arch, stump, cave, stack.</a:t>
             </a:r>
             <a:endParaRPr lang="en-US" sz="4000" dirty="0"/>
           </a:p>
@@ -14035,7 +14665,7 @@
                 <a:ea typeface="Calibri" pitchFamily="34" charset="-122"/>
                 <a:cs typeface="Calibri" pitchFamily="34" charset="-120"/>
               </a:rPr>
-              <a:t>HOMEWORK</a:t>
+              <a:t>FORMATIVE EVALUATION</a:t>
             </a:r>
             <a:endParaRPr lang="en-US" sz="1400" dirty="0"/>
           </a:p>
@@ -14100,7 +14730,7 @@
                 <a:ea typeface="Times New Roman" pitchFamily="34" charset="-122"/>
                 <a:cs typeface="Times New Roman" pitchFamily="34" charset="-120"/>
               </a:rPr>
-              <a:t>Homework</a:t>
+              <a:t>Expected Answer</a:t>
             </a:r>
             <a:endParaRPr lang="en-US" sz="3600" dirty="0"/>
           </a:p>
@@ -14142,7 +14772,7 @@
                 <a:ea typeface="Times New Roman" pitchFamily="34" charset="-122"/>
                 <a:cs typeface="Times New Roman" pitchFamily="34" charset="-120"/>
               </a:rPr>
-              <a:t>Put some sand at one end of a tray of water and make waves from one corner. Write where the sand moves.</a:t>
+              <a:t>Cave, arch, stack, stump.</a:t>
             </a:r>
             <a:endParaRPr lang="en-US" sz="4000" dirty="0"/>
           </a:p>
@@ -14493,7 +15123,7 @@
                 <a:ea typeface="Calibri" pitchFamily="34" charset="-122"/>
                 <a:cs typeface="Calibri" pitchFamily="34" charset="-120"/>
               </a:rPr>
-              <a:t>NEXT LESSON</a:t>
+              <a:t>FORMATIVE EVALUATION</a:t>
             </a:r>
             <a:endParaRPr lang="en-US" sz="1400" dirty="0"/>
           </a:p>
@@ -14558,7 +15188,7 @@
                 <a:ea typeface="Times New Roman" pitchFamily="34" charset="-122"/>
                 <a:cs typeface="Times New Roman" pitchFamily="34" charset="-120"/>
               </a:rPr>
-              <a:t>Next Lesson</a:t>
+              <a:t>Evaluation 2</a:t>
             </a:r>
             <a:endParaRPr lang="en-US" sz="3600" dirty="0"/>
           </a:p>
@@ -14582,17 +15212,17 @@
           <a:ln/>
         </p:spPr>
         <p:txBody>
-          <a:bodyPr wrap="square" lIns="0" tIns="0" rIns="0" bIns="0" rtlCol="0" anchor="ctr"/>
-          <a:lstStyle/>
-          <a:p>
-            <a:pPr algn="ctr" indent="0" marL="0">
+          <a:bodyPr wrap="square" lIns="0" tIns="0" rIns="0" bIns="0" rtlCol="0" anchor="t"/>
+          <a:lstStyle/>
+          <a:p>
+            <a:pPr algn="l" indent="0" marL="0">
               <a:spcAft>
                 <a:spcPts val="800"/>
               </a:spcAft>
               <a:buNone/>
             </a:pPr>
             <a:r>
-              <a:rPr lang="en-US" sz="4000" b="1" dirty="0">
+              <a:rPr lang="en-US" sz="4000" dirty="0">
                 <a:solidFill>
                   <a:srgbClr val="111111"/>
                 </a:solidFill>
@@ -14600,27 +15230,7 @@
                 <a:ea typeface="Times New Roman" pitchFamily="34" charset="-122"/>
                 <a:cs typeface="Times New Roman" pitchFamily="34" charset="-120"/>
               </a:rPr>
-              <a:t>Our next lesson will be on:</a:t>
-            </a:r>
-            <a:endParaRPr lang="en-US" sz="4000" dirty="0"/>
-          </a:p>
-          <a:p>
-            <a:pPr algn="ctr" indent="0" marL="0">
-              <a:spcAft>
-                <a:spcPts val="800"/>
-              </a:spcAft>
-              <a:buNone/>
-            </a:pPr>
-            <a:r>
-              <a:rPr lang="en-US" sz="4000" b="1" dirty="0">
-                <a:solidFill>
-                  <a:srgbClr val="990011"/>
-                </a:solidFill>
-                <a:latin typeface="Times New Roman" pitchFamily="34" charset="0"/>
-                <a:ea typeface="Times New Roman" pitchFamily="34" charset="-122"/>
-                <a:cs typeface="Times New Roman" pitchFamily="34" charset="-120"/>
-              </a:rPr>
-              <a:t>Lesson 25: Main Depositional Features of Wave Action</a:t>
+              <a:t>What is hydraulic action?</a:t>
             </a:r>
             <a:endParaRPr lang="en-US" sz="4000" dirty="0"/>
           </a:p>
@@ -14732,6 +15342,968 @@
                 <a:ea typeface="Calibri" pitchFamily="34" charset="-122"/>
                 <a:cs typeface="Calibri" pitchFamily="34" charset="-120"/>
               </a:rPr>
+              <a:t>FORMATIVE EVALUATION</a:t>
+            </a:r>
+            <a:endParaRPr lang="en-US" sz="1400" dirty="0"/>
+          </a:p>
+        </p:txBody>
+      </p:sp>
+      <p:pic>
+        <p:nvPicPr>
+          <p:cNvPr id="3" name="Image 0" descr="/home/claude/f4/img/minesec_sheet.png">    </p:cNvPr>
+          <p:cNvPicPr>
+            <a:picLocks noChangeAspect="1"/>
+          </p:cNvPicPr>
+          <p:nvPr/>
+        </p:nvPicPr>
+        <p:blipFill>
+          <a:blip r:embed="rId1"/>
+          <a:stretch>
+            <a:fillRect/>
+          </a:stretch>
+        </p:blipFill>
+        <p:spPr>
+          <a:xfrm>
+            <a:off x="0" y="658368"/>
+            <a:ext cx="5120640" cy="5833872"/>
+          </a:xfrm>
+          <a:prstGeom prst="rect">
+            <a:avLst/>
+          </a:prstGeom>
+        </p:spPr>
+      </p:pic>
+      <p:sp>
+        <p:nvSpPr>
+          <p:cNvPr id="4" name="Text 1"/>
+          <p:cNvSpPr/>
+          <p:nvPr/>
+        </p:nvSpPr>
+        <p:spPr>
+          <a:xfrm>
+            <a:off x="5349240" y="1005840"/>
+            <a:ext cx="6522415" cy="731520"/>
+          </a:xfrm>
+          <a:prstGeom prst="rect">
+            <a:avLst/>
+          </a:prstGeom>
+          <a:noFill/>
+          <a:ln/>
+        </p:spPr>
+        <p:txBody>
+          <a:bodyPr wrap="square" lIns="0" tIns="0" rIns="0" bIns="0" rtlCol="0" anchor="ctr">
+            <a:normAutofit/>
+          </a:bodyPr>
+          <a:lstStyle/>
+          <a:p>
+            <a:pPr algn="ctr" indent="0" marL="0">
+              <a:buNone/>
+            </a:pPr>
+            <a:r>
+              <a:rPr lang="en-US" sz="3600" b="1" dirty="0">
+                <a:solidFill>
+                  <a:srgbClr val="990011"/>
+                </a:solidFill>
+                <a:latin typeface="Times New Roman" pitchFamily="34" charset="0"/>
+                <a:ea typeface="Times New Roman" pitchFamily="34" charset="-122"/>
+                <a:cs typeface="Times New Roman" pitchFamily="34" charset="-120"/>
+              </a:rPr>
+              <a:t>Expected Answer</a:t>
+            </a:r>
+            <a:endParaRPr lang="en-US" sz="3600" dirty="0"/>
+          </a:p>
+        </p:txBody>
+      </p:sp>
+      <p:sp>
+        <p:nvSpPr>
+          <p:cNvPr id="5" name="Text 2"/>
+          <p:cNvSpPr/>
+          <p:nvPr/>
+        </p:nvSpPr>
+        <p:spPr>
+          <a:xfrm>
+            <a:off x="5349240" y="1783080"/>
+            <a:ext cx="6522415" cy="4663440"/>
+          </a:xfrm>
+          <a:prstGeom prst="rect">
+            <a:avLst/>
+          </a:prstGeom>
+          <a:noFill/>
+          <a:ln/>
+        </p:spPr>
+        <p:txBody>
+          <a:bodyPr wrap="square" lIns="0" tIns="0" rIns="0" bIns="0" rtlCol="0" anchor="t"/>
+          <a:lstStyle/>
+          <a:p>
+            <a:pPr algn="l" indent="0" marL="0">
+              <a:spcAft>
+                <a:spcPts val="800"/>
+              </a:spcAft>
+              <a:buNone/>
+            </a:pPr>
+            <a:r>
+              <a:rPr lang="en-US" sz="4000" dirty="0">
+                <a:solidFill>
+                  <a:srgbClr val="111111"/>
+                </a:solidFill>
+                <a:latin typeface="Times New Roman" pitchFamily="34" charset="0"/>
+                <a:ea typeface="Times New Roman" pitchFamily="34" charset="-122"/>
+                <a:cs typeface="Times New Roman" pitchFamily="34" charset="-120"/>
+              </a:rPr>
+              <a:t>The force of the waves breaking the rock.</a:t>
+            </a:r>
+            <a:endParaRPr lang="en-US" sz="4000" dirty="0"/>
+          </a:p>
+        </p:txBody>
+      </p:sp>
+      <p:sp>
+        <p:nvSpPr>
+          <p:cNvPr id="25" name="Slide Number Placeholder 0"/>
+          <p:cNvSpPr>
+            <a:spLocks noGrp="1"/>
+          </p:cNvSpPr>
+          <p:nvPr>
+            <p:ph type="sldNum" sz="quarter" idx="4294967295"/>
+          </p:nvPr>
+        </p:nvSpPr>
+        <p:spPr>
+          <a:xfrm>
+            <a:off x="27432" y="91440"/>
+            <a:ext cx="585216" cy="475488"/>
+          </a:xfrm>
+          <a:prstGeom prst="rect">
+            <a:avLst/>
+          </a:prstGeom>
+          <a:extLst>
+            <a:ext uri="{C572A759-6A51-4108-AA02-DFA0A04FC94B}">
+              <ma14:wrappingTextBoxFlag xmlns:ma14="http://schemas.microsoft.com/office/mac/drawingml/2011/main" val="0"/>
+            </a:ext>
+          </a:extLst>
+        </p:spPr>
+        <p:txBody>
+          <a:bodyPr/>
+          <a:lstStyle>
+            <a:lvl1pPr>
+              <a:defRPr sz="2000">
+                <a:solidFill>
+                  <a:srgbClr val="FFFFFF"/>
+                </a:solidFill>
+                <a:latin typeface="Calibri"/>
+                <a:ea typeface="Calibri"/>
+                <a:cs typeface="Calibri"/>
+              </a:defRPr>
+            </a:lvl1pPr>
+          </a:lstStyle>
+          <a:p>
+            <a:pPr algn="ctr"/>
+            <a:fld id="{F7021451-1387-4CA6-816F-3879F97B5CBC}" type="slidenum">
+              <a:rPr b="1" lang="en-US"/>
+              <a:t>41</a:t>
+            </a:fld>
+            <a:endParaRPr lang="en-US"/>
+          </a:p>
+        </p:txBody>
+      </p:sp>
+    </p:spTree>
+  </p:cSld>
+  <p:clrMapOvr>
+    <a:masterClrMapping/>
+  </p:clrMapOvr>
+</p:sld>
+</file>
+
+<file path=ppt/slides/slide42.xml><?xml version="1.0" encoding="utf-8"?>
+<p:sld xmlns:a="http://schemas.openxmlformats.org/drawingml/2006/main" xmlns:r="http://schemas.openxmlformats.org/officeDocument/2006/relationships" xmlns:p="http://schemas.openxmlformats.org/presentationml/2006/main">
+  <p:cSld name="Slide 42">
+    <p:spTree>
+      <p:nvGrpSpPr>
+        <p:cNvPr id="1" name=""/>
+        <p:cNvGrpSpPr/>
+        <p:nvPr/>
+      </p:nvGrpSpPr>
+      <p:grpSpPr>
+        <a:xfrm>
+          <a:off x="0" y="0"/>
+          <a:ext cx="0" cy="0"/>
+          <a:chOff x="0" y="0"/>
+          <a:chExt cx="0" cy="0"/>
+        </a:xfrm>
+      </p:grpSpPr>
+      <p:sp>
+        <p:nvSpPr>
+          <p:cNvPr id="2" name="Text 0"/>
+          <p:cNvSpPr/>
+          <p:nvPr/>
+        </p:nvSpPr>
+        <p:spPr>
+          <a:xfrm>
+            <a:off x="457200" y="713232"/>
+            <a:ext cx="11368735" cy="274320"/>
+          </a:xfrm>
+          <a:prstGeom prst="rect">
+            <a:avLst/>
+          </a:prstGeom>
+          <a:noFill/>
+          <a:ln/>
+        </p:spPr>
+        <p:txBody>
+          <a:bodyPr wrap="square" lIns="0" tIns="0" rIns="0" bIns="0" rtlCol="0" anchor="ctr"/>
+          <a:lstStyle/>
+          <a:p>
+            <a:pPr algn="r" indent="0" marL="0">
+              <a:buNone/>
+            </a:pPr>
+            <a:r>
+              <a:rPr lang="en-US" sz="1400" b="1" dirty="0">
+                <a:solidFill>
+                  <a:srgbClr val="1C3F6E"/>
+                </a:solidFill>
+                <a:latin typeface="Calibri" pitchFamily="34" charset="0"/>
+                <a:ea typeface="Calibri" pitchFamily="34" charset="-122"/>
+                <a:cs typeface="Calibri" pitchFamily="34" charset="-120"/>
+              </a:rPr>
+              <a:t>REMEDIATION</a:t>
+            </a:r>
+            <a:endParaRPr lang="en-US" sz="1400" dirty="0"/>
+          </a:p>
+        </p:txBody>
+      </p:sp>
+      <p:pic>
+        <p:nvPicPr>
+          <p:cNvPr id="3" name="Image 0" descr="/home/claude/f4/img/minesec_sheet.png">    </p:cNvPr>
+          <p:cNvPicPr>
+            <a:picLocks noChangeAspect="1"/>
+          </p:cNvPicPr>
+          <p:nvPr/>
+        </p:nvPicPr>
+        <p:blipFill>
+          <a:blip r:embed="rId1"/>
+          <a:stretch>
+            <a:fillRect/>
+          </a:stretch>
+        </p:blipFill>
+        <p:spPr>
+          <a:xfrm>
+            <a:off x="0" y="658368"/>
+            <a:ext cx="1463040" cy="5833872"/>
+          </a:xfrm>
+          <a:prstGeom prst="rect">
+            <a:avLst/>
+          </a:prstGeom>
+        </p:spPr>
+      </p:pic>
+      <p:sp>
+        <p:nvSpPr>
+          <p:cNvPr id="4" name="Text 1"/>
+          <p:cNvSpPr/>
+          <p:nvPr/>
+        </p:nvSpPr>
+        <p:spPr>
+          <a:xfrm>
+            <a:off x="1691640" y="1005840"/>
+            <a:ext cx="10180015" cy="731520"/>
+          </a:xfrm>
+          <a:prstGeom prst="rect">
+            <a:avLst/>
+          </a:prstGeom>
+          <a:noFill/>
+          <a:ln/>
+        </p:spPr>
+        <p:txBody>
+          <a:bodyPr wrap="square" lIns="0" tIns="0" rIns="0" bIns="0" rtlCol="0" anchor="ctr">
+            <a:normAutofit/>
+          </a:bodyPr>
+          <a:lstStyle/>
+          <a:p>
+            <a:pPr algn="ctr" indent="0" marL="0">
+              <a:buNone/>
+            </a:pPr>
+            <a:r>
+              <a:rPr lang="en-US" sz="3600" b="1" dirty="0">
+                <a:solidFill>
+                  <a:srgbClr val="990011"/>
+                </a:solidFill>
+                <a:latin typeface="Times New Roman" pitchFamily="34" charset="0"/>
+                <a:ea typeface="Times New Roman" pitchFamily="34" charset="-122"/>
+                <a:cs typeface="Times New Roman" pitchFamily="34" charset="-120"/>
+              </a:rPr>
+              <a:t>Remediation</a:t>
+            </a:r>
+            <a:endParaRPr lang="en-US" sz="3600" dirty="0"/>
+          </a:p>
+        </p:txBody>
+      </p:sp>
+      <p:sp>
+        <p:nvSpPr>
+          <p:cNvPr id="5" name="Text 2"/>
+          <p:cNvSpPr/>
+          <p:nvPr/>
+        </p:nvSpPr>
+        <p:spPr>
+          <a:xfrm>
+            <a:off x="1691640" y="1783080"/>
+            <a:ext cx="10180015" cy="4663440"/>
+          </a:xfrm>
+          <a:prstGeom prst="rect">
+            <a:avLst/>
+          </a:prstGeom>
+          <a:noFill/>
+          <a:ln/>
+        </p:spPr>
+        <p:txBody>
+          <a:bodyPr wrap="square" lIns="0" tIns="0" rIns="0" bIns="0" rtlCol="0" anchor="t"/>
+          <a:lstStyle/>
+          <a:p>
+            <a:pPr algn="l" indent="0" marL="0">
+              <a:spcAft>
+                <a:spcPts val="800"/>
+              </a:spcAft>
+              <a:buNone/>
+            </a:pPr>
+            <a:r>
+              <a:rPr lang="en-US" sz="4000" b="1" dirty="0">
+                <a:solidFill>
+                  <a:srgbClr val="111111"/>
+                </a:solidFill>
+                <a:latin typeface="Times New Roman" pitchFamily="34" charset="0"/>
+                <a:ea typeface="Times New Roman" pitchFamily="34" charset="-122"/>
+                <a:cs typeface="Times New Roman" pitchFamily="34" charset="-120"/>
+              </a:rPr>
+              <a:t>Fill in the blanks:</a:t>
+            </a:r>
+            <a:endParaRPr lang="en-US" sz="4000" dirty="0"/>
+          </a:p>
+          <a:p>
+            <a:pPr algn="l" marL="342900" indent="-342900">
+              <a:spcAft>
+                <a:spcPts val="800"/>
+              </a:spcAft>
+              <a:buSzPct val="100000"/>
+              <a:buFont typeface="+mj-lt"/>
+              <a:buAutoNum type="arabicPeriod" startAt="1"/>
+            </a:pPr>
+            <a:r>
+              <a:rPr lang="en-US" sz="4000" dirty="0">
+                <a:solidFill>
+                  <a:srgbClr val="111111"/>
+                </a:solidFill>
+                <a:latin typeface="Times New Roman" pitchFamily="34" charset="0"/>
+                <a:ea typeface="Times New Roman" pitchFamily="34" charset="-122"/>
+                <a:cs typeface="Times New Roman" pitchFamily="34" charset="-120"/>
+              </a:rPr>
+              <a:t>A steep rock face on the coast is a ______.</a:t>
+            </a:r>
+            <a:endParaRPr lang="en-US" sz="4000" dirty="0"/>
+          </a:p>
+          <a:p>
+            <a:pPr algn="l" marL="342900" indent="-342900">
+              <a:spcAft>
+                <a:spcPts val="800"/>
+              </a:spcAft>
+              <a:buSzPct val="100000"/>
+              <a:buFont typeface="+mj-lt"/>
+              <a:buAutoNum type="arabicPeriod" startAt="1"/>
+            </a:pPr>
+            <a:r>
+              <a:rPr lang="en-US" sz="4000" dirty="0">
+                <a:solidFill>
+                  <a:srgbClr val="111111"/>
+                </a:solidFill>
+                <a:latin typeface="Times New Roman" pitchFamily="34" charset="0"/>
+                <a:ea typeface="Times New Roman" pitchFamily="34" charset="-122"/>
+                <a:cs typeface="Times New Roman" pitchFamily="34" charset="-120"/>
+              </a:rPr>
+              <a:t>A cave that goes through a headland becomes an ______.</a:t>
+            </a:r>
+            <a:endParaRPr lang="en-US" sz="4000" dirty="0"/>
+          </a:p>
+          <a:p>
+            <a:pPr algn="l" marL="342900" indent="-342900">
+              <a:spcAft>
+                <a:spcPts val="800"/>
+              </a:spcAft>
+              <a:buSzPct val="100000"/>
+              <a:buFont typeface="+mj-lt"/>
+              <a:buAutoNum type="arabicPeriod" startAt="1"/>
+            </a:pPr>
+            <a:r>
+              <a:rPr lang="en-US" sz="4000" dirty="0">
+                <a:solidFill>
+                  <a:srgbClr val="111111"/>
+                </a:solidFill>
+                <a:latin typeface="Times New Roman" pitchFamily="34" charset="0"/>
+                <a:ea typeface="Times New Roman" pitchFamily="34" charset="-122"/>
+                <a:cs typeface="Times New Roman" pitchFamily="34" charset="-120"/>
+              </a:rPr>
+              <a:t>A pillar of rock in the sea is a ______.</a:t>
+            </a:r>
+            <a:endParaRPr lang="en-US" sz="4000" dirty="0"/>
+          </a:p>
+        </p:txBody>
+      </p:sp>
+      <p:sp>
+        <p:nvSpPr>
+          <p:cNvPr id="25" name="Slide Number Placeholder 0"/>
+          <p:cNvSpPr>
+            <a:spLocks noGrp="1"/>
+          </p:cNvSpPr>
+          <p:nvPr>
+            <p:ph type="sldNum" sz="quarter" idx="4294967295"/>
+          </p:nvPr>
+        </p:nvSpPr>
+        <p:spPr>
+          <a:xfrm>
+            <a:off x="27432" y="91440"/>
+            <a:ext cx="585216" cy="475488"/>
+          </a:xfrm>
+          <a:prstGeom prst="rect">
+            <a:avLst/>
+          </a:prstGeom>
+          <a:extLst>
+            <a:ext uri="{C572A759-6A51-4108-AA02-DFA0A04FC94B}">
+              <ma14:wrappingTextBoxFlag xmlns:ma14="http://schemas.microsoft.com/office/mac/drawingml/2011/main" val="0"/>
+            </a:ext>
+          </a:extLst>
+        </p:spPr>
+        <p:txBody>
+          <a:bodyPr/>
+          <a:lstStyle>
+            <a:lvl1pPr>
+              <a:defRPr sz="2000">
+                <a:solidFill>
+                  <a:srgbClr val="FFFFFF"/>
+                </a:solidFill>
+                <a:latin typeface="Calibri"/>
+                <a:ea typeface="Calibri"/>
+                <a:cs typeface="Calibri"/>
+              </a:defRPr>
+            </a:lvl1pPr>
+          </a:lstStyle>
+          <a:p>
+            <a:pPr algn="ctr"/>
+            <a:fld id="{F7021451-1387-4CA6-816F-3879F97B5CBC}" type="slidenum">
+              <a:rPr b="1" lang="en-US"/>
+              <a:t>42</a:t>
+            </a:fld>
+            <a:endParaRPr lang="en-US"/>
+          </a:p>
+        </p:txBody>
+      </p:sp>
+    </p:spTree>
+  </p:cSld>
+  <p:clrMapOvr>
+    <a:masterClrMapping/>
+  </p:clrMapOvr>
+</p:sld>
+</file>
+
+<file path=ppt/slides/slide43.xml><?xml version="1.0" encoding="utf-8"?>
+<p:sld xmlns:a="http://schemas.openxmlformats.org/drawingml/2006/main" xmlns:r="http://schemas.openxmlformats.org/officeDocument/2006/relationships" xmlns:p="http://schemas.openxmlformats.org/presentationml/2006/main">
+  <p:cSld name="Slide 43">
+    <p:spTree>
+      <p:nvGrpSpPr>
+        <p:cNvPr id="1" name=""/>
+        <p:cNvGrpSpPr/>
+        <p:nvPr/>
+      </p:nvGrpSpPr>
+      <p:grpSpPr>
+        <a:xfrm>
+          <a:off x="0" y="0"/>
+          <a:ext cx="0" cy="0"/>
+          <a:chOff x="0" y="0"/>
+          <a:chExt cx="0" cy="0"/>
+        </a:xfrm>
+      </p:grpSpPr>
+      <p:sp>
+        <p:nvSpPr>
+          <p:cNvPr id="2" name="Text 0"/>
+          <p:cNvSpPr/>
+          <p:nvPr/>
+        </p:nvSpPr>
+        <p:spPr>
+          <a:xfrm>
+            <a:off x="457200" y="713232"/>
+            <a:ext cx="11368735" cy="274320"/>
+          </a:xfrm>
+          <a:prstGeom prst="rect">
+            <a:avLst/>
+          </a:prstGeom>
+          <a:noFill/>
+          <a:ln/>
+        </p:spPr>
+        <p:txBody>
+          <a:bodyPr wrap="square" lIns="0" tIns="0" rIns="0" bIns="0" rtlCol="0" anchor="ctr"/>
+          <a:lstStyle/>
+          <a:p>
+            <a:pPr algn="r" indent="0" marL="0">
+              <a:buNone/>
+            </a:pPr>
+            <a:r>
+              <a:rPr lang="en-US" sz="1400" b="1" dirty="0">
+                <a:solidFill>
+                  <a:srgbClr val="1C3F6E"/>
+                </a:solidFill>
+                <a:latin typeface="Calibri" pitchFamily="34" charset="0"/>
+                <a:ea typeface="Calibri" pitchFamily="34" charset="-122"/>
+                <a:cs typeface="Calibri" pitchFamily="34" charset="-120"/>
+              </a:rPr>
+              <a:t>HOMEWORK</a:t>
+            </a:r>
+            <a:endParaRPr lang="en-US" sz="1400" dirty="0"/>
+          </a:p>
+        </p:txBody>
+      </p:sp>
+      <p:pic>
+        <p:nvPicPr>
+          <p:cNvPr id="3" name="Image 0" descr="/home/claude/f4/img/minesec_sheet.png">    </p:cNvPr>
+          <p:cNvPicPr>
+            <a:picLocks noChangeAspect="1"/>
+          </p:cNvPicPr>
+          <p:nvPr/>
+        </p:nvPicPr>
+        <p:blipFill>
+          <a:blip r:embed="rId1"/>
+          <a:stretch>
+            <a:fillRect/>
+          </a:stretch>
+        </p:blipFill>
+        <p:spPr>
+          <a:xfrm>
+            <a:off x="0" y="658368"/>
+            <a:ext cx="5120640" cy="5833872"/>
+          </a:xfrm>
+          <a:prstGeom prst="rect">
+            <a:avLst/>
+          </a:prstGeom>
+        </p:spPr>
+      </p:pic>
+      <p:sp>
+        <p:nvSpPr>
+          <p:cNvPr id="4" name="Text 1"/>
+          <p:cNvSpPr/>
+          <p:nvPr/>
+        </p:nvSpPr>
+        <p:spPr>
+          <a:xfrm>
+            <a:off x="5349240" y="1005840"/>
+            <a:ext cx="6522415" cy="731520"/>
+          </a:xfrm>
+          <a:prstGeom prst="rect">
+            <a:avLst/>
+          </a:prstGeom>
+          <a:noFill/>
+          <a:ln/>
+        </p:spPr>
+        <p:txBody>
+          <a:bodyPr wrap="square" lIns="0" tIns="0" rIns="0" bIns="0" rtlCol="0" anchor="ctr">
+            <a:normAutofit/>
+          </a:bodyPr>
+          <a:lstStyle/>
+          <a:p>
+            <a:pPr algn="ctr" indent="0" marL="0">
+              <a:buNone/>
+            </a:pPr>
+            <a:r>
+              <a:rPr lang="en-US" sz="3600" b="1" dirty="0">
+                <a:solidFill>
+                  <a:srgbClr val="990011"/>
+                </a:solidFill>
+                <a:latin typeface="Times New Roman" pitchFamily="34" charset="0"/>
+                <a:ea typeface="Times New Roman" pitchFamily="34" charset="-122"/>
+                <a:cs typeface="Times New Roman" pitchFamily="34" charset="-120"/>
+              </a:rPr>
+              <a:t>Homework</a:t>
+            </a:r>
+            <a:endParaRPr lang="en-US" sz="3600" dirty="0"/>
+          </a:p>
+        </p:txBody>
+      </p:sp>
+      <p:sp>
+        <p:nvSpPr>
+          <p:cNvPr id="5" name="Text 2"/>
+          <p:cNvSpPr/>
+          <p:nvPr/>
+        </p:nvSpPr>
+        <p:spPr>
+          <a:xfrm>
+            <a:off x="5349240" y="1783080"/>
+            <a:ext cx="6522415" cy="4663440"/>
+          </a:xfrm>
+          <a:prstGeom prst="rect">
+            <a:avLst/>
+          </a:prstGeom>
+          <a:noFill/>
+          <a:ln/>
+        </p:spPr>
+        <p:txBody>
+          <a:bodyPr wrap="square" lIns="0" tIns="0" rIns="0" bIns="0" rtlCol="0" anchor="t"/>
+          <a:lstStyle/>
+          <a:p>
+            <a:pPr algn="l" indent="0" marL="0">
+              <a:spcAft>
+                <a:spcPts val="800"/>
+              </a:spcAft>
+              <a:buNone/>
+            </a:pPr>
+            <a:r>
+              <a:rPr lang="en-US" sz="4000" dirty="0">
+                <a:solidFill>
+                  <a:srgbClr val="111111"/>
+                </a:solidFill>
+                <a:latin typeface="Times New Roman" pitchFamily="34" charset="0"/>
+                <a:ea typeface="Times New Roman" pitchFamily="34" charset="-122"/>
+                <a:cs typeface="Times New Roman" pitchFamily="34" charset="-120"/>
+              </a:rPr>
+              <a:t>Put some sand at one end of a tray of water and make waves from one corner. Write where the sand moves.</a:t>
+            </a:r>
+            <a:endParaRPr lang="en-US" sz="4000" dirty="0"/>
+          </a:p>
+        </p:txBody>
+      </p:sp>
+      <p:sp>
+        <p:nvSpPr>
+          <p:cNvPr id="25" name="Slide Number Placeholder 0"/>
+          <p:cNvSpPr>
+            <a:spLocks noGrp="1"/>
+          </p:cNvSpPr>
+          <p:nvPr>
+            <p:ph type="sldNum" sz="quarter" idx="4294967295"/>
+          </p:nvPr>
+        </p:nvSpPr>
+        <p:spPr>
+          <a:xfrm>
+            <a:off x="27432" y="91440"/>
+            <a:ext cx="585216" cy="475488"/>
+          </a:xfrm>
+          <a:prstGeom prst="rect">
+            <a:avLst/>
+          </a:prstGeom>
+          <a:extLst>
+            <a:ext uri="{C572A759-6A51-4108-AA02-DFA0A04FC94B}">
+              <ma14:wrappingTextBoxFlag xmlns:ma14="http://schemas.microsoft.com/office/mac/drawingml/2011/main" val="0"/>
+            </a:ext>
+          </a:extLst>
+        </p:spPr>
+        <p:txBody>
+          <a:bodyPr/>
+          <a:lstStyle>
+            <a:lvl1pPr>
+              <a:defRPr sz="2000">
+                <a:solidFill>
+                  <a:srgbClr val="FFFFFF"/>
+                </a:solidFill>
+                <a:latin typeface="Calibri"/>
+                <a:ea typeface="Calibri"/>
+                <a:cs typeface="Calibri"/>
+              </a:defRPr>
+            </a:lvl1pPr>
+          </a:lstStyle>
+          <a:p>
+            <a:pPr algn="ctr"/>
+            <a:fld id="{F7021451-1387-4CA6-816F-3879F97B5CBC}" type="slidenum">
+              <a:rPr b="1" lang="en-US"/>
+              <a:t>43</a:t>
+            </a:fld>
+            <a:endParaRPr lang="en-US"/>
+          </a:p>
+        </p:txBody>
+      </p:sp>
+    </p:spTree>
+  </p:cSld>
+  <p:clrMapOvr>
+    <a:masterClrMapping/>
+  </p:clrMapOvr>
+</p:sld>
+</file>
+
+<file path=ppt/slides/slide44.xml><?xml version="1.0" encoding="utf-8"?>
+<p:sld xmlns:a="http://schemas.openxmlformats.org/drawingml/2006/main" xmlns:r="http://schemas.openxmlformats.org/officeDocument/2006/relationships" xmlns:p="http://schemas.openxmlformats.org/presentationml/2006/main">
+  <p:cSld name="Slide 44">
+    <p:spTree>
+      <p:nvGrpSpPr>
+        <p:cNvPr id="1" name=""/>
+        <p:cNvGrpSpPr/>
+        <p:nvPr/>
+      </p:nvGrpSpPr>
+      <p:grpSpPr>
+        <a:xfrm>
+          <a:off x="0" y="0"/>
+          <a:ext cx="0" cy="0"/>
+          <a:chOff x="0" y="0"/>
+          <a:chExt cx="0" cy="0"/>
+        </a:xfrm>
+      </p:grpSpPr>
+      <p:sp>
+        <p:nvSpPr>
+          <p:cNvPr id="2" name="Text 0"/>
+          <p:cNvSpPr/>
+          <p:nvPr/>
+        </p:nvSpPr>
+        <p:spPr>
+          <a:xfrm>
+            <a:off x="457200" y="713232"/>
+            <a:ext cx="11368735" cy="274320"/>
+          </a:xfrm>
+          <a:prstGeom prst="rect">
+            <a:avLst/>
+          </a:prstGeom>
+          <a:noFill/>
+          <a:ln/>
+        </p:spPr>
+        <p:txBody>
+          <a:bodyPr wrap="square" lIns="0" tIns="0" rIns="0" bIns="0" rtlCol="0" anchor="ctr"/>
+          <a:lstStyle/>
+          <a:p>
+            <a:pPr algn="r" indent="0" marL="0">
+              <a:buNone/>
+            </a:pPr>
+            <a:r>
+              <a:rPr lang="en-US" sz="1400" b="1" dirty="0">
+                <a:solidFill>
+                  <a:srgbClr val="1C3F6E"/>
+                </a:solidFill>
+                <a:latin typeface="Calibri" pitchFamily="34" charset="0"/>
+                <a:ea typeface="Calibri" pitchFamily="34" charset="-122"/>
+                <a:cs typeface="Calibri" pitchFamily="34" charset="-120"/>
+              </a:rPr>
+              <a:t>NEXT LESSON</a:t>
+            </a:r>
+            <a:endParaRPr lang="en-US" sz="1400" dirty="0"/>
+          </a:p>
+        </p:txBody>
+      </p:sp>
+      <p:pic>
+        <p:nvPicPr>
+          <p:cNvPr id="3" name="Image 0" descr="/home/claude/f4/img/minesec_sheet.png">    </p:cNvPr>
+          <p:cNvPicPr>
+            <a:picLocks noChangeAspect="1"/>
+          </p:cNvPicPr>
+          <p:nvPr/>
+        </p:nvPicPr>
+        <p:blipFill>
+          <a:blip r:embed="rId1"/>
+          <a:stretch>
+            <a:fillRect/>
+          </a:stretch>
+        </p:blipFill>
+        <p:spPr>
+          <a:xfrm>
+            <a:off x="0" y="658368"/>
+            <a:ext cx="5120640" cy="5833872"/>
+          </a:xfrm>
+          <a:prstGeom prst="rect">
+            <a:avLst/>
+          </a:prstGeom>
+        </p:spPr>
+      </p:pic>
+      <p:sp>
+        <p:nvSpPr>
+          <p:cNvPr id="4" name="Text 1"/>
+          <p:cNvSpPr/>
+          <p:nvPr/>
+        </p:nvSpPr>
+        <p:spPr>
+          <a:xfrm>
+            <a:off x="5349240" y="1005840"/>
+            <a:ext cx="6522415" cy="731520"/>
+          </a:xfrm>
+          <a:prstGeom prst="rect">
+            <a:avLst/>
+          </a:prstGeom>
+          <a:noFill/>
+          <a:ln/>
+        </p:spPr>
+        <p:txBody>
+          <a:bodyPr wrap="square" lIns="0" tIns="0" rIns="0" bIns="0" rtlCol="0" anchor="ctr">
+            <a:normAutofit/>
+          </a:bodyPr>
+          <a:lstStyle/>
+          <a:p>
+            <a:pPr algn="ctr" indent="0" marL="0">
+              <a:buNone/>
+            </a:pPr>
+            <a:r>
+              <a:rPr lang="en-US" sz="3600" b="1" dirty="0">
+                <a:solidFill>
+                  <a:srgbClr val="990011"/>
+                </a:solidFill>
+                <a:latin typeface="Times New Roman" pitchFamily="34" charset="0"/>
+                <a:ea typeface="Times New Roman" pitchFamily="34" charset="-122"/>
+                <a:cs typeface="Times New Roman" pitchFamily="34" charset="-120"/>
+              </a:rPr>
+              <a:t>Next Lesson</a:t>
+            </a:r>
+            <a:endParaRPr lang="en-US" sz="3600" dirty="0"/>
+          </a:p>
+        </p:txBody>
+      </p:sp>
+      <p:sp>
+        <p:nvSpPr>
+          <p:cNvPr id="5" name="Text 2"/>
+          <p:cNvSpPr/>
+          <p:nvPr/>
+        </p:nvSpPr>
+        <p:spPr>
+          <a:xfrm>
+            <a:off x="5349240" y="1783080"/>
+            <a:ext cx="6522415" cy="4663440"/>
+          </a:xfrm>
+          <a:prstGeom prst="rect">
+            <a:avLst/>
+          </a:prstGeom>
+          <a:noFill/>
+          <a:ln/>
+        </p:spPr>
+        <p:txBody>
+          <a:bodyPr wrap="square" lIns="0" tIns="0" rIns="0" bIns="0" rtlCol="0" anchor="ctr"/>
+          <a:lstStyle/>
+          <a:p>
+            <a:pPr algn="ctr" indent="0" marL="0">
+              <a:spcAft>
+                <a:spcPts val="800"/>
+              </a:spcAft>
+              <a:buNone/>
+            </a:pPr>
+            <a:r>
+              <a:rPr lang="en-US" sz="4000" b="1" dirty="0">
+                <a:solidFill>
+                  <a:srgbClr val="111111"/>
+                </a:solidFill>
+                <a:latin typeface="Times New Roman" pitchFamily="34" charset="0"/>
+                <a:ea typeface="Times New Roman" pitchFamily="34" charset="-122"/>
+                <a:cs typeface="Times New Roman" pitchFamily="34" charset="-120"/>
+              </a:rPr>
+              <a:t>Our next lesson will be on:</a:t>
+            </a:r>
+            <a:endParaRPr lang="en-US" sz="4000" dirty="0"/>
+          </a:p>
+          <a:p>
+            <a:pPr algn="ctr" indent="0" marL="0">
+              <a:spcAft>
+                <a:spcPts val="800"/>
+              </a:spcAft>
+              <a:buNone/>
+            </a:pPr>
+            <a:r>
+              <a:rPr lang="en-US" sz="4000" b="1" dirty="0">
+                <a:solidFill>
+                  <a:srgbClr val="990011"/>
+                </a:solidFill>
+                <a:latin typeface="Times New Roman" pitchFamily="34" charset="0"/>
+                <a:ea typeface="Times New Roman" pitchFamily="34" charset="-122"/>
+                <a:cs typeface="Times New Roman" pitchFamily="34" charset="-120"/>
+              </a:rPr>
+              <a:t>Lesson 25: Main Depositional Features of Wave Action</a:t>
+            </a:r>
+            <a:endParaRPr lang="en-US" sz="4000" dirty="0"/>
+          </a:p>
+        </p:txBody>
+      </p:sp>
+      <p:sp>
+        <p:nvSpPr>
+          <p:cNvPr id="25" name="Slide Number Placeholder 0"/>
+          <p:cNvSpPr>
+            <a:spLocks noGrp="1"/>
+          </p:cNvSpPr>
+          <p:nvPr>
+            <p:ph type="sldNum" sz="quarter" idx="4294967295"/>
+          </p:nvPr>
+        </p:nvSpPr>
+        <p:spPr>
+          <a:xfrm>
+            <a:off x="27432" y="91440"/>
+            <a:ext cx="585216" cy="475488"/>
+          </a:xfrm>
+          <a:prstGeom prst="rect">
+            <a:avLst/>
+          </a:prstGeom>
+          <a:extLst>
+            <a:ext uri="{C572A759-6A51-4108-AA02-DFA0A04FC94B}">
+              <ma14:wrappingTextBoxFlag xmlns:ma14="http://schemas.microsoft.com/office/mac/drawingml/2011/main" val="0"/>
+            </a:ext>
+          </a:extLst>
+        </p:spPr>
+        <p:txBody>
+          <a:bodyPr/>
+          <a:lstStyle>
+            <a:lvl1pPr>
+              <a:defRPr sz="2000">
+                <a:solidFill>
+                  <a:srgbClr val="FFFFFF"/>
+                </a:solidFill>
+                <a:latin typeface="Calibri"/>
+                <a:ea typeface="Calibri"/>
+                <a:cs typeface="Calibri"/>
+              </a:defRPr>
+            </a:lvl1pPr>
+          </a:lstStyle>
+          <a:p>
+            <a:pPr algn="ctr"/>
+            <a:fld id="{F7021451-1387-4CA6-816F-3879F97B5CBC}" type="slidenum">
+              <a:rPr b="1" lang="en-US"/>
+              <a:t>44</a:t>
+            </a:fld>
+            <a:endParaRPr lang="en-US"/>
+          </a:p>
+        </p:txBody>
+      </p:sp>
+    </p:spTree>
+  </p:cSld>
+  <p:clrMapOvr>
+    <a:masterClrMapping/>
+  </p:clrMapOvr>
+</p:sld>
+</file>
+
+<file path=ppt/slides/slide45.xml><?xml version="1.0" encoding="utf-8"?>
+<p:sld xmlns:a="http://schemas.openxmlformats.org/drawingml/2006/main" xmlns:r="http://schemas.openxmlformats.org/officeDocument/2006/relationships" xmlns:p="http://schemas.openxmlformats.org/presentationml/2006/main">
+  <p:cSld name="Slide 45">
+    <p:spTree>
+      <p:nvGrpSpPr>
+        <p:cNvPr id="1" name=""/>
+        <p:cNvGrpSpPr/>
+        <p:nvPr/>
+      </p:nvGrpSpPr>
+      <p:grpSpPr>
+        <a:xfrm>
+          <a:off x="0" y="0"/>
+          <a:ext cx="0" cy="0"/>
+          <a:chOff x="0" y="0"/>
+          <a:chExt cx="0" cy="0"/>
+        </a:xfrm>
+      </p:grpSpPr>
+      <p:sp>
+        <p:nvSpPr>
+          <p:cNvPr id="2" name="Text 0"/>
+          <p:cNvSpPr/>
+          <p:nvPr/>
+        </p:nvSpPr>
+        <p:spPr>
+          <a:xfrm>
+            <a:off x="457200" y="713232"/>
+            <a:ext cx="11368735" cy="274320"/>
+          </a:xfrm>
+          <a:prstGeom prst="rect">
+            <a:avLst/>
+          </a:prstGeom>
+          <a:noFill/>
+          <a:ln/>
+        </p:spPr>
+        <p:txBody>
+          <a:bodyPr wrap="square" lIns="0" tIns="0" rIns="0" bIns="0" rtlCol="0" anchor="ctr"/>
+          <a:lstStyle/>
+          <a:p>
+            <a:pPr algn="r" indent="0" marL="0">
+              <a:buNone/>
+            </a:pPr>
+            <a:r>
+              <a:rPr lang="en-US" sz="1400" b="1" dirty="0">
+                <a:solidFill>
+                  <a:srgbClr val="1C3F6E"/>
+                </a:solidFill>
+                <a:latin typeface="Calibri" pitchFamily="34" charset="0"/>
+                <a:ea typeface="Calibri" pitchFamily="34" charset="-122"/>
+                <a:cs typeface="Calibri" pitchFamily="34" charset="-120"/>
+              </a:rPr>
               <a:t>BILINGUAL GAME</a:t>
             </a:r>
             <a:endParaRPr lang="en-US" sz="1400" dirty="0"/>
@@ -14779,7 +16351,7 @@
       </p:sp>
       <p:graphicFrame>
         <p:nvGraphicFramePr>
-          <p:cNvPr id="42" name="Table 0"/>
+          <p:cNvPr id="46" name="Table 0"/>
           <p:cNvGraphicFramePr>
             <a:graphicFrameLocks noGrp="1"/>
           </p:cNvGraphicFramePr>
@@ -16091,7 +17663,7 @@
             <a:pPr algn="ctr"/>
             <a:fld id="{F7021451-1387-4CA6-816F-3879F97B5CBC}" type="slidenum">
               <a:rPr b="1" lang="en-US"/>
-              <a:t>41</a:t>
+              <a:t>45</a:t>
             </a:fld>
             <a:endParaRPr lang="en-US"/>
           </a:p>
@@ -16105,9 +17677,9 @@
 </p:sld>
 </file>
 
-<file path=ppt/slides/slide42.xml><?xml version="1.0" encoding="utf-8"?>
+<file path=ppt/slides/slide46.xml><?xml version="1.0" encoding="utf-8"?>
 <p:sld xmlns:a="http://schemas.openxmlformats.org/drawingml/2006/main" xmlns:r="http://schemas.openxmlformats.org/officeDocument/2006/relationships" xmlns:p="http://schemas.openxmlformats.org/presentationml/2006/main">
-  <p:cSld name="Slide 42">
+  <p:cSld name="Slide 46">
     <p:spTree>
       <p:nvGrpSpPr>
         <p:cNvPr id="1" name=""/>
@@ -16202,7 +17774,7 @@
       </p:sp>
       <p:graphicFrame>
         <p:nvGraphicFramePr>
-          <p:cNvPr id="43" name="Table 0"/>
+          <p:cNvPr id="47" name="Table 0"/>
           <p:cNvGraphicFramePr>
             <a:graphicFrameLocks noGrp="1"/>
           </p:cNvGraphicFramePr>
@@ -16824,7 +18396,7 @@
             <a:pPr algn="ctr"/>
             <a:fld id="{F7021451-1387-4CA6-816F-3879F97B5CBC}" type="slidenum">
               <a:rPr b="1" lang="en-US"/>
-              <a:t>42</a:t>
+              <a:t>46</a:t>
             </a:fld>
             <a:endParaRPr lang="en-US"/>
           </a:p>
@@ -16838,9 +18410,9 @@
 </p:sld>
 </file>
 
-<file path=ppt/slides/slide43.xml><?xml version="1.0" encoding="utf-8"?>
+<file path=ppt/slides/slide47.xml><?xml version="1.0" encoding="utf-8"?>
 <p:sld xmlns:a="http://schemas.openxmlformats.org/drawingml/2006/main" xmlns:r="http://schemas.openxmlformats.org/officeDocument/2006/relationships" xmlns:p="http://schemas.openxmlformats.org/presentationml/2006/main">
-  <p:cSld name="Slide 43">
+  <p:cSld name="Slide 47">
     <p:spTree>
       <p:nvGrpSpPr>
         <p:cNvPr id="1" name=""/>
@@ -16935,7 +18507,7 @@
       </p:sp>
       <p:graphicFrame>
         <p:nvGraphicFramePr>
-          <p:cNvPr id="44" name="Table 0"/>
+          <p:cNvPr id="48" name="Table 0"/>
           <p:cNvGraphicFramePr>
             <a:graphicFrameLocks noGrp="1"/>
           </p:cNvGraphicFramePr>
@@ -17045,7 +18617,7 @@
                           <a:ea typeface="Calibri" pitchFamily="34" charset="-122"/>
                           <a:cs typeface="Calibri" pitchFamily="34" charset="-120"/>
                         </a:rPr>
-                        <a:t>Erosional Processes of Waves; Erosional Features.</a:t>
+                        <a:t>DEFINITIONS; Erosional Processes of Waves; Erosional Features.</a:t>
                       </a:r>
                       <a:endParaRPr lang="en-US" sz="1600" dirty="0">
                         <a:latin typeface="Calibri" charset="0"/>
@@ -17695,7 +19267,7 @@
             <a:pPr algn="ctr"/>
             <a:fld id="{F7021451-1387-4CA6-816F-3879F97B5CBC}" type="slidenum">
               <a:rPr b="1" lang="en-US"/>
-              <a:t>43</a:t>
+              <a:t>47</a:t>
             </a:fld>
             <a:endParaRPr lang="en-US"/>
           </a:p>
@@ -17709,9 +19281,9 @@
 </p:sld>
 </file>
 
-<file path=ppt/slides/slide44.xml><?xml version="1.0" encoding="utf-8"?>
+<file path=ppt/slides/slide48.xml><?xml version="1.0" encoding="utf-8"?>
 <p:sld xmlns:a="http://schemas.openxmlformats.org/drawingml/2006/main" xmlns:r="http://schemas.openxmlformats.org/officeDocument/2006/relationships" xmlns:p="http://schemas.openxmlformats.org/presentationml/2006/main">
-  <p:cSld name="Slide 44">
+  <p:cSld name="Slide 48">
     <p:spTree>
       <p:nvGrpSpPr>
         <p:cNvPr id="1" name=""/>
@@ -17909,7 +19481,7 @@
                 <a:ea typeface="Calibri" pitchFamily="34" charset="-122"/>
                 <a:cs typeface="Calibri" pitchFamily="34" charset="-120"/>
               </a:rPr>
-              <a:t>Without the projector (Activity 1): draw a rock with a hollow at the bottom.</a:t>
+              <a:t>Without the projector (Activity 1): draw a notch at the foot of a cliff.</a:t>
             </a:r>
             <a:endParaRPr lang="en-US" sz="2000" dirty="0"/>
           </a:p>
@@ -17930,7 +19502,7 @@
                 <a:ea typeface="Calibri" pitchFamily="34" charset="-122"/>
                 <a:cs typeface="Calibri" pitchFamily="34" charset="-120"/>
               </a:rPr>
-              <a:t>Without the projector (Activity 2): draw the four steps on the board.</a:t>
+              <a:t>Without the projector (Activity 2): draw the four stages on the board.</a:t>
             </a:r>
             <a:endParaRPr lang="en-US" sz="2000" dirty="0"/>
           </a:p>
@@ -17951,7 +19523,7 @@
                 <a:ea typeface="Calibri" pitchFamily="34" charset="-122"/>
                 <a:cs typeface="Calibri" pitchFamily="34" charset="-120"/>
               </a:rPr>
-              <a:t>Without the projector (Activity 3): use the drawing on the board.</a:t>
+              <a:t>Without the projector (Activity 3): describe the rocks near Limbe.</a:t>
             </a:r>
             <a:endParaRPr lang="en-US" sz="2000" dirty="0"/>
           </a:p>
@@ -17999,7 +19571,7 @@
             <a:pPr algn="ctr"/>
             <a:fld id="{F7021451-1387-4CA6-816F-3879F97B5CBC}" type="slidenum">
               <a:rPr b="1" lang="en-US"/>
-              <a:t>44</a:t>
+              <a:t>48</a:t>
             </a:fld>
             <a:endParaRPr lang="en-US"/>
           </a:p>
@@ -18013,9 +19585,9 @@
 </p:sld>
 </file>
 
-<file path=ppt/slides/slide45.xml><?xml version="1.0" encoding="utf-8"?>
+<file path=ppt/slides/slide49.xml><?xml version="1.0" encoding="utf-8"?>
 <p:sld xmlns:a="http://schemas.openxmlformats.org/drawingml/2006/main" xmlns:r="http://schemas.openxmlformats.org/officeDocument/2006/relationships" xmlns:p="http://schemas.openxmlformats.org/presentationml/2006/main">
-  <p:cSld name="Slide 45">
+  <p:cSld name="Slide 49">
     <p:spTree>
       <p:nvGrpSpPr>
         <p:cNvPr id="1" name=""/>
@@ -18303,7 +19875,7 @@
             <a:pPr algn="ctr"/>
             <a:fld id="{F7021451-1387-4CA6-816F-3879F97B5CBC}" type="slidenum">
               <a:rPr b="1" lang="en-US"/>
-              <a:t>45</a:t>
+              <a:t>49</a:t>
             </a:fld>
             <a:endParaRPr lang="en-US"/>
           </a:p>

--- a/lecons/F3/28_FORM4_LESSON24_Erosional_Features_of_Wave_Action.pptx
+++ b/lecons/F3/28_FORM4_LESSON24_Erosional_Features_of_Wave_Action.pptx
@@ -2838,7 +2838,7 @@
           <a:p>
             <a:r>
               <a:rPr lang="en-US" dirty="0"/>
-              <a:t>Let us copy Erosional Features. Wave erosion forms the following features. Copy the point on Capes and bays on the left, then draw the diagram on the right: capes and bays. Give it a title and label it clearly.</a:t>
+              <a:t>Let us copy Erosional Features. The erosional features of waves and local examples are the following. Copy the point on Capes and bays on the left, then draw the diagram on the right: capes and bays. Give it a title and label it clearly.</a:t>
             </a:r>
             <a:endParaRPr lang="en-US" dirty="0"/>
           </a:p>
@@ -13091,7 +13091,7 @@
               <a:buNone/>
             </a:pPr>
             <a:r>
-              <a:rPr lang="en-US" sz="3600" i="1" dirty="0">
+              <a:rPr lang="en-US" sz="3200" i="1" dirty="0">
                 <a:solidFill>
                   <a:srgbClr val="111111"/>
                 </a:solidFill>
@@ -13099,9 +13099,9 @@
                 <a:ea typeface="Times New Roman" pitchFamily="34" charset="-122"/>
                 <a:cs typeface="Times New Roman" pitchFamily="34" charset="-120"/>
               </a:rPr>
-              <a:t>Wave erosion forms the following features:</a:t>
-            </a:r>
-            <a:endParaRPr lang="en-US" sz="3600" dirty="0"/>
+              <a:t>The erosional features of waves and local examples are the following:</a:t>
+            </a:r>
+            <a:endParaRPr lang="en-US" sz="3200" dirty="0"/>
           </a:p>
           <a:p>
             <a:pPr algn="l" indent="0" marL="0">
@@ -13111,7 +13111,7 @@
               <a:buNone/>
             </a:pPr>
             <a:r>
-              <a:rPr lang="en-US" sz="3600" b="1" dirty="0">
+              <a:rPr lang="en-US" sz="3200" b="1" dirty="0">
                 <a:solidFill>
                   <a:srgbClr val="111111"/>
                 </a:solidFill>
@@ -13128,7 +13128,7 @@
               <a:buNone/>
             </a:pPr>
             <a:r>
-              <a:rPr lang="en-US" sz="3600" dirty="0">
+              <a:rPr lang="en-US" sz="3200" dirty="0">
                 <a:solidFill>
                   <a:srgbClr val="111111"/>
                 </a:solidFill>
@@ -13138,7 +13138,7 @@
               </a:rPr>
               <a:t>Where hard and soft rocks alternate, hard rock remains as capes and soft rock is worn back into bays.</a:t>
             </a:r>
-            <a:endParaRPr lang="en-US" sz="3600" dirty="0"/>
+            <a:endParaRPr lang="en-US" sz="3200" dirty="0"/>
           </a:p>
         </p:txBody>
       </p:sp>

--- a/lecons/F3/28_FORM4_LESSON24_Erosional_Features_of_Wave_Action.pptx
+++ b/lecons/F3/28_FORM4_LESSON24_Erosional_Features_of_Wave_Action.pptx
@@ -3454,7 +3454,7 @@
           <a:p>
             <a:r>
               <a:rPr lang="en-US" dirty="0"/>
-              <a:t>Before we start the new lesson, let us correct the homework I gave you at the end of Lesson 23: Wave Action in Coastal Areas. The question was: Look at photos of the coast of Limbe or Kribi. Draw a rocky part of the coast and name any holes, arches or rocks in the sea that you see. Take out your exercise books.</a:t>
+              <a:t>Before we start the new lesson, let us correct the homework I gave you at the end of Lesson 23: Wave Action in Coastal Areas. The question was: Name three erosional features of waves. Take out your exercise books.</a:t>
             </a:r>
             <a:endParaRPr lang="en-US" dirty="0"/>
           </a:p>
@@ -3806,7 +3806,7 @@
           <a:p>
             <a:r>
               <a:rPr lang="en-US" dirty="0"/>
-              <a:t>For your homework: Put some sand at one end of a tray of water and make waves from one corner. Write where the sand moves. We shall correct it at the beginning of our next lesson.</a:t>
+              <a:t>For your homework: Name two depositional features of waves. We shall correct it at the beginning of our next lesson.</a:t>
             </a:r>
             <a:endParaRPr lang="en-US" dirty="0"/>
           </a:p>
@@ -4422,7 +4422,7 @@
           <a:p>
             <a:r>
               <a:rPr lang="en-US" dirty="0"/>
-              <a:t>Here is a good answer. The drawing should show cliffs with caves (holes at the bottom), perhaps an arch and rocks standing in the sea (stacks), as along the rocky coast near Limbe. Compare it with your own answer and correct your work in red.</a:t>
+              <a:t>Here is a good answer. The cliff, the cave and the arch (also the stack and the stump). Compare it with your own answer and correct your work in red.</a:t>
             </a:r>
             <a:endParaRPr lang="en-US" dirty="0"/>
           </a:p>
@@ -14907,7 +14907,7 @@
         <p:spPr>
           <a:xfrm>
             <a:off x="0" y="658368"/>
-            <a:ext cx="3840480" cy="5833872"/>
+            <a:ext cx="5120640" cy="5833872"/>
           </a:xfrm>
           <a:prstGeom prst="rect">
             <a:avLst/>
@@ -14922,8 +14922,8 @@
         </p:nvSpPr>
         <p:spPr>
           <a:xfrm>
-            <a:off x="4069080" y="1005840"/>
-            <a:ext cx="7802575" cy="731520"/>
+            <a:off x="5349240" y="1005840"/>
+            <a:ext cx="6522415" cy="731520"/>
           </a:xfrm>
           <a:prstGeom prst="rect">
             <a:avLst/>
@@ -14963,8 +14963,8 @@
         </p:nvSpPr>
         <p:spPr>
           <a:xfrm>
-            <a:off x="4069080" y="1783080"/>
-            <a:ext cx="7802575" cy="4663440"/>
+            <a:off x="5349240" y="1783080"/>
+            <a:ext cx="6522415" cy="4663440"/>
           </a:xfrm>
           <a:prstGeom prst="rect">
             <a:avLst/>
@@ -15011,7 +15011,7 @@
                 <a:ea typeface="Times New Roman" pitchFamily="34" charset="-122"/>
                 <a:cs typeface="Times New Roman" pitchFamily="34" charset="-120"/>
               </a:rPr>
-              <a:t>Look at photos of the coast of Limbe or Kribi. Draw a rocky part of the coast and name any holes, arches or rocks in the sea that you see.</a:t>
+              <a:t>Name three erosional features of waves.</a:t>
             </a:r>
             <a:endParaRPr lang="en-US" sz="4000" dirty="0"/>
           </a:p>
@@ -15953,7 +15953,7 @@
                 <a:ea typeface="Times New Roman" pitchFamily="34" charset="-122"/>
                 <a:cs typeface="Times New Roman" pitchFamily="34" charset="-120"/>
               </a:rPr>
-              <a:t>Put some sand at one end of a tray of water and make waves from one corner. Write where the sand moves.</a:t>
+              <a:t>Name two depositional features of waves.</a:t>
             </a:r>
             <a:endParaRPr lang="en-US" sz="4000" dirty="0"/>
           </a:p>
@@ -18893,7 +18893,7 @@
                           <a:ea typeface="Calibri" pitchFamily="34" charset="-122"/>
                           <a:cs typeface="Calibri" pitchFamily="34" charset="-120"/>
                         </a:rPr>
-                        <a:t>Put some sand at one end of a tray of water and make waves from one corner. Write where the sand moves.</a:t>
+                        <a:t>Name two depositional features of waves.</a:t>
                       </a:r>
                       <a:endParaRPr lang="en-US" sz="1600" dirty="0">
                         <a:latin typeface="Calibri" charset="0"/>
@@ -20046,7 +20046,7 @@
                 <a:ea typeface="Times New Roman" pitchFamily="34" charset="-122"/>
                 <a:cs typeface="Times New Roman" pitchFamily="34" charset="-120"/>
               </a:rPr>
-              <a:t>The drawing should show cliffs with caves (holes at the bottom), perhaps an arch and rocks standing in the sea (stacks), as along the rocky coast near Limbe.</a:t>
+              <a:t>The cliff, the cave and the arch (also the stack and the stump).</a:t>
             </a:r>
             <a:endParaRPr lang="en-US" sz="4000" dirty="0"/>
           </a:p>
